--- a/slides/Week1-Wed-Bias-In-Vibe-Coding.pptx
+++ b/slides/Week1-Wed-Bias-In-Vibe-Coding.pptx
@@ -15,6 +15,9 @@
     <p:sldId id="263" r:id="rId15"/>
     <p:sldId id="264" r:id="rId16"/>
     <p:sldId id="265" r:id="rId17"/>
+    <p:sldId id="266" r:id="rId18"/>
+    <p:sldId id="267" r:id="rId19"/>
+    <p:sldId id="268" r:id="rId20"/>
   </p:sldIdLst>
   <p:sldSz cx="12191695" cy="6858000" type="screen4x3"/>
   <p:notesSz cx="6858000" cy="9144000"/>
@@ -582,6 +585,216 @@
           <a:p>
             <a:r>
               <a:t>Kept your 'Vibe Bias' definition; the lead definition line: 'The tendency of LLMs to generate UI/UX patterns based on the most frequent (often Western-centric) data in their training sets.'</a:t>
+            </a:r>
+          </a:p>
+        </p:txBody>
+      </p:sp>
+      <p:sp>
+        <p:nvSpPr>
+          <p:cNvPr id="4" name="Slide Number Placeholder 3"/>
+          <p:cNvSpPr>
+            <a:spLocks noGrp="1"/>
+          </p:cNvSpPr>
+          <p:nvPr>
+            <p:ph type="sldNum" idx="5" sz="quarter"/>
+          </p:nvPr>
+        </p:nvSpPr>
+        <p:spPr/>
+      </p:sp>
+    </p:spTree>
+  </p:cSld>
+  <p:clrMapOvr>
+    <a:masterClrMapping/>
+  </p:clrMapOvr>
+</p:notes>
+</file>
+
+<file path=ppt/notesSlides/notesSlide3.xml><?xml version="1.0" encoding="utf-8"?>
+<p:notes xmlns:a="http://schemas.openxmlformats.org/drawingml/2006/main" xmlns:p="http://schemas.openxmlformats.org/presentationml/2006/main" xmlns:r="http://schemas.openxmlformats.org/officeDocument/2006/relationships">
+  <p:cSld>
+    <p:spTree>
+      <p:nvGrpSpPr>
+        <p:cNvPr id="1" name=""/>
+        <p:cNvGrpSpPr/>
+        <p:nvPr/>
+      </p:nvGrpSpPr>
+      <p:grpSpPr>
+        <a:xfrm>
+          <a:off x="0" y="0"/>
+          <a:ext cx="0" cy="0"/>
+          <a:chOff x="0" y="0"/>
+          <a:chExt cx="0" cy="0"/>
+        </a:xfrm>
+      </p:grpSpPr>
+      <p:sp>
+        <p:nvSpPr>
+          <p:cNvPr id="2" name="Slide Image Placeholder 1"/>
+          <p:cNvSpPr>
+            <a:spLocks noGrp="1"/>
+          </p:cNvSpPr>
+          <p:nvPr>
+            <p:ph type="sldImg" idx="2"/>
+          </p:nvPr>
+        </p:nvSpPr>
+        <p:spPr/>
+      </p:sp>
+      <p:sp>
+        <p:nvSpPr>
+          <p:cNvPr id="3" name="Notes Placeholder 2"/>
+          <p:cNvSpPr>
+            <a:spLocks noGrp="1"/>
+          </p:cNvSpPr>
+          <p:nvPr>
+            <p:ph type="body" idx="3" sz="quarter"/>
+          </p:nvPr>
+        </p:nvSpPr>
+        <p:spPr/>
+        <p:txBody>
+          <a:bodyPr/>
+          <a:lstStyle/>
+          <a:p>
+            <a:r>
+              <a:t>Article (interactive — great live demo: readers edit the system prompt and rewrite the article): washingtonpost.com/technology/interactive/2026/chatbots-hidden-rules-system-prompts/</a:t>
+            </a:r>
+          </a:p>
+        </p:txBody>
+      </p:sp>
+      <p:sp>
+        <p:nvSpPr>
+          <p:cNvPr id="4" name="Slide Number Placeholder 3"/>
+          <p:cNvSpPr>
+            <a:spLocks noGrp="1"/>
+          </p:cNvSpPr>
+          <p:nvPr>
+            <p:ph type="sldNum" idx="5" sz="quarter"/>
+          </p:nvPr>
+        </p:nvSpPr>
+        <p:spPr/>
+      </p:sp>
+    </p:spTree>
+  </p:cSld>
+  <p:clrMapOvr>
+    <a:masterClrMapping/>
+  </p:clrMapOvr>
+</p:notes>
+</file>
+
+<file path=ppt/notesSlides/notesSlide4.xml><?xml version="1.0" encoding="utf-8"?>
+<p:notes xmlns:a="http://schemas.openxmlformats.org/drawingml/2006/main" xmlns:p="http://schemas.openxmlformats.org/presentationml/2006/main" xmlns:r="http://schemas.openxmlformats.org/officeDocument/2006/relationships">
+  <p:cSld>
+    <p:spTree>
+      <p:nvGrpSpPr>
+        <p:cNvPr id="1" name=""/>
+        <p:cNvGrpSpPr/>
+        <p:nvPr/>
+      </p:nvGrpSpPr>
+      <p:grpSpPr>
+        <a:xfrm>
+          <a:off x="0" y="0"/>
+          <a:ext cx="0" cy="0"/>
+          <a:chOff x="0" y="0"/>
+          <a:chExt cx="0" cy="0"/>
+        </a:xfrm>
+      </p:grpSpPr>
+      <p:sp>
+        <p:nvSpPr>
+          <p:cNvPr id="2" name="Slide Image Placeholder 1"/>
+          <p:cNvSpPr>
+            <a:spLocks noGrp="1"/>
+          </p:cNvSpPr>
+          <p:nvPr>
+            <p:ph type="sldImg" idx="2"/>
+          </p:nvPr>
+        </p:nvSpPr>
+        <p:spPr/>
+      </p:sp>
+      <p:sp>
+        <p:nvSpPr>
+          <p:cNvPr id="3" name="Notes Placeholder 2"/>
+          <p:cNvSpPr>
+            <a:spLocks noGrp="1"/>
+          </p:cNvSpPr>
+          <p:nvPr>
+            <p:ph type="body" idx="3" sz="quarter"/>
+          </p:nvPr>
+        </p:nvSpPr>
+        <p:spPr/>
+        <p:txBody>
+          <a:bodyPr/>
+          <a:lstStyle/>
+          <a:p>
+            <a:r>
+              <a:t>Leaked prompts run 2,300–27,000 words. Numbers = words per category per chatbot, from the WaPo graphic.</a:t>
+            </a:r>
+          </a:p>
+        </p:txBody>
+      </p:sp>
+      <p:sp>
+        <p:nvSpPr>
+          <p:cNvPr id="4" name="Slide Number Placeholder 3"/>
+          <p:cNvSpPr>
+            <a:spLocks noGrp="1"/>
+          </p:cNvSpPr>
+          <p:nvPr>
+            <p:ph type="sldNum" idx="5" sz="quarter"/>
+          </p:nvPr>
+        </p:nvSpPr>
+        <p:spPr/>
+      </p:sp>
+    </p:spTree>
+  </p:cSld>
+  <p:clrMapOvr>
+    <a:masterClrMapping/>
+  </p:clrMapOvr>
+</p:notes>
+</file>
+
+<file path=ppt/notesSlides/notesSlide5.xml><?xml version="1.0" encoding="utf-8"?>
+<p:notes xmlns:a="http://schemas.openxmlformats.org/drawingml/2006/main" xmlns:p="http://schemas.openxmlformats.org/presentationml/2006/main" xmlns:r="http://schemas.openxmlformats.org/officeDocument/2006/relationships">
+  <p:cSld>
+    <p:spTree>
+      <p:nvGrpSpPr>
+        <p:cNvPr id="1" name=""/>
+        <p:cNvGrpSpPr/>
+        <p:nvPr/>
+      </p:nvGrpSpPr>
+      <p:grpSpPr>
+        <a:xfrm>
+          <a:off x="0" y="0"/>
+          <a:ext cx="0" cy="0"/>
+          <a:chOff x="0" y="0"/>
+          <a:chExt cx="0" cy="0"/>
+        </a:xfrm>
+      </p:grpSpPr>
+      <p:sp>
+        <p:nvSpPr>
+          <p:cNvPr id="2" name="Slide Image Placeholder 1"/>
+          <p:cNvSpPr>
+            <a:spLocks noGrp="1"/>
+          </p:cNvSpPr>
+          <p:nvPr>
+            <p:ph type="sldImg" idx="2"/>
+          </p:nvPr>
+        </p:nvSpPr>
+        <p:spPr/>
+      </p:sp>
+      <p:sp>
+        <p:nvSpPr>
+          <p:cNvPr id="3" name="Notes Placeholder 2"/>
+          <p:cNvSpPr>
+            <a:spLocks noGrp="1"/>
+          </p:cNvSpPr>
+          <p:nvPr>
+            <p:ph type="body" idx="3" sz="quarter"/>
+          </p:nvPr>
+        </p:nvSpPr>
+        <p:spPr/>
+        <p:txBody>
+          <a:bodyPr/>
+          <a:lstStyle/>
+          <a:p>
+            <a:r>
+              <a:t>Bridges the Mirror Effect (bias from training data) to bias imposed deliberately upstream. The 'try it' bullet is an optional 5-min activity.</a:t>
             </a:r>
           </a:p>
         </p:txBody>
@@ -3816,6 +4029,1619 @@
                 </a:solidFill>
                 <a:latin typeface="Courier New"/>
               </a:rPr>
+              <a:t>CASE STUDY</a:t>
+            </a:r>
+          </a:p>
+        </p:txBody>
+      </p:sp>
+      <p:sp>
+        <p:nvSpPr>
+          <p:cNvPr id="3" name="Rectangle 2"/>
+          <p:cNvSpPr/>
+          <p:nvPr/>
+        </p:nvSpPr>
+        <p:spPr>
+          <a:xfrm>
+            <a:off x="640080" y="932688"/>
+            <a:ext cx="822960" cy="73152"/>
+          </a:xfrm>
+          <a:prstGeom prst="rect">
+            <a:avLst/>
+          </a:prstGeom>
+          <a:solidFill>
+            <a:srgbClr val="00FF41"/>
+          </a:solidFill>
+          <a:ln>
+            <a:noFill/>
+          </a:ln>
+          <a:effectLst/>
+        </p:spPr>
+        <p:style>
+          <a:lnRef idx="1">
+            <a:schemeClr val="accent1"/>
+          </a:lnRef>
+          <a:fillRef idx="3">
+            <a:schemeClr val="accent1"/>
+          </a:fillRef>
+          <a:effectRef idx="2">
+            <a:schemeClr val="accent1"/>
+          </a:effectRef>
+          <a:fontRef idx="minor">
+            <a:schemeClr val="lt1"/>
+          </a:fontRef>
+        </p:style>
+        <p:txBody>
+          <a:bodyPr rtlCol="0" anchor="ctr"/>
+          <a:lstStyle/>
+          <a:p>
+            <a:pPr algn="ctr"/>
+          </a:p>
+        </p:txBody>
+      </p:sp>
+      <p:sp>
+        <p:nvSpPr>
+          <p:cNvPr id="4" name="TextBox 3"/>
+          <p:cNvSpPr txBox="1"/>
+          <p:nvPr/>
+        </p:nvSpPr>
+        <p:spPr>
+          <a:xfrm>
+            <a:off x="640080" y="1188720"/>
+            <a:ext cx="10972800" cy="914400"/>
+          </a:xfrm>
+          <a:prstGeom prst="rect">
+            <a:avLst/>
+          </a:prstGeom>
+          <a:noFill/>
+        </p:spPr>
+        <p:txBody>
+          <a:bodyPr wrap="square" anchor="t">
+            <a:spAutoFit/>
+          </a:bodyPr>
+          <a:lstStyle/>
+          <a:p>
+            <a:pPr algn="l">
+              <a:lnSpc>
+                <a:spcPct val="100000"/>
+              </a:lnSpc>
+            </a:pPr>
+            <a:r>
+              <a:rPr sz="3200" b="1">
+                <a:solidFill>
+                  <a:srgbClr val="F5F7FA"/>
+                </a:solidFill>
+                <a:latin typeface="Arial"/>
+              </a:rPr>
+              <a:t>Case study: “Make it Professional”</a:t>
+            </a:r>
+          </a:p>
+        </p:txBody>
+      </p:sp>
+      <p:sp>
+        <p:nvSpPr>
+          <p:cNvPr id="5" name="Rounded Rectangle 4"/>
+          <p:cNvSpPr/>
+          <p:nvPr/>
+        </p:nvSpPr>
+        <p:spPr>
+          <a:xfrm>
+            <a:off x="640080" y="2377440"/>
+            <a:ext cx="5212080" cy="2377440"/>
+          </a:xfrm>
+          <a:prstGeom prst="roundRect">
+            <a:avLst/>
+          </a:prstGeom>
+          <a:solidFill>
+            <a:srgbClr val="151B26"/>
+          </a:solidFill>
+          <a:ln w="15240">
+            <a:solidFill>
+              <a:srgbClr val="00FF41"/>
+            </a:solidFill>
+            <a:prstDash val="dash"/>
+          </a:ln>
+          <a:effectLst/>
+        </p:spPr>
+        <p:style>
+          <a:lnRef idx="1">
+            <a:schemeClr val="accent1"/>
+          </a:lnRef>
+          <a:fillRef idx="3">
+            <a:schemeClr val="accent1"/>
+          </a:fillRef>
+          <a:effectRef idx="2">
+            <a:schemeClr val="accent1"/>
+          </a:effectRef>
+          <a:fontRef idx="minor">
+            <a:schemeClr val="lt1"/>
+          </a:fontRef>
+        </p:style>
+        <p:txBody>
+          <a:bodyPr rtlCol="0" anchor="ctr"/>
+          <a:lstStyle/>
+          <a:p>
+            <a:pPr algn="ctr"/>
+          </a:p>
+        </p:txBody>
+      </p:sp>
+      <p:sp>
+        <p:nvSpPr>
+          <p:cNvPr id="6" name="TextBox 5"/>
+          <p:cNvSpPr txBox="1"/>
+          <p:nvPr/>
+        </p:nvSpPr>
+        <p:spPr>
+          <a:xfrm>
+            <a:off x="640080" y="3200400"/>
+            <a:ext cx="5212080" cy="548640"/>
+          </a:xfrm>
+          <a:prstGeom prst="rect">
+            <a:avLst/>
+          </a:prstGeom>
+          <a:noFill/>
+        </p:spPr>
+        <p:txBody>
+          <a:bodyPr wrap="square" anchor="t">
+            <a:spAutoFit/>
+          </a:bodyPr>
+          <a:lstStyle/>
+          <a:p>
+            <a:pPr algn="ctr">
+              <a:lnSpc>
+                <a:spcPct val="100000"/>
+              </a:lnSpc>
+            </a:pPr>
+            <a:r>
+              <a:rPr sz="1800" b="1">
+                <a:solidFill>
+                  <a:srgbClr val="00FF41"/>
+                </a:solidFill>
+                <a:latin typeface="Courier New"/>
+              </a:rPr>
+              <a:t>🖼  Result A</a:t>
+            </a:r>
+          </a:p>
+        </p:txBody>
+      </p:sp>
+      <p:sp>
+        <p:nvSpPr>
+          <p:cNvPr id="7" name="TextBox 6"/>
+          <p:cNvSpPr txBox="1"/>
+          <p:nvPr/>
+        </p:nvSpPr>
+        <p:spPr>
+          <a:xfrm>
+            <a:off x="640080" y="3749039"/>
+            <a:ext cx="5212080" cy="548640"/>
+          </a:xfrm>
+          <a:prstGeom prst="rect">
+            <a:avLst/>
+          </a:prstGeom>
+          <a:noFill/>
+        </p:spPr>
+        <p:txBody>
+          <a:bodyPr wrap="square" anchor="t">
+            <a:spAutoFit/>
+          </a:bodyPr>
+          <a:lstStyle/>
+          <a:p>
+            <a:pPr algn="ctr">
+              <a:lnSpc>
+                <a:spcPct val="100000"/>
+              </a:lnSpc>
+            </a:pPr>
+            <a:r>
+              <a:rPr sz="1400" b="0">
+                <a:solidFill>
+                  <a:srgbClr val="8A94A6"/>
+                </a:solidFill>
+                <a:latin typeface="Arial"/>
+              </a:rPr>
+              <a:t>“A standard landing page.”</a:t>
+            </a:r>
+          </a:p>
+        </p:txBody>
+      </p:sp>
+      <p:sp>
+        <p:nvSpPr>
+          <p:cNvPr id="8" name="Rounded Rectangle 7"/>
+          <p:cNvSpPr/>
+          <p:nvPr/>
+        </p:nvSpPr>
+        <p:spPr>
+          <a:xfrm>
+            <a:off x="6309360" y="2377440"/>
+            <a:ext cx="5212080" cy="2377440"/>
+          </a:xfrm>
+          <a:prstGeom prst="roundRect">
+            <a:avLst/>
+          </a:prstGeom>
+          <a:solidFill>
+            <a:srgbClr val="151B26"/>
+          </a:solidFill>
+          <a:ln w="15240">
+            <a:solidFill>
+              <a:srgbClr val="00FF41"/>
+            </a:solidFill>
+            <a:prstDash val="dash"/>
+          </a:ln>
+          <a:effectLst/>
+        </p:spPr>
+        <p:style>
+          <a:lnRef idx="1">
+            <a:schemeClr val="accent1"/>
+          </a:lnRef>
+          <a:fillRef idx="3">
+            <a:schemeClr val="accent1"/>
+          </a:fillRef>
+          <a:effectRef idx="2">
+            <a:schemeClr val="accent1"/>
+          </a:effectRef>
+          <a:fontRef idx="minor">
+            <a:schemeClr val="lt1"/>
+          </a:fontRef>
+        </p:style>
+        <p:txBody>
+          <a:bodyPr rtlCol="0" anchor="ctr"/>
+          <a:lstStyle/>
+          <a:p>
+            <a:pPr algn="ctr"/>
+          </a:p>
+        </p:txBody>
+      </p:sp>
+      <p:sp>
+        <p:nvSpPr>
+          <p:cNvPr id="9" name="TextBox 8"/>
+          <p:cNvSpPr txBox="1"/>
+          <p:nvPr/>
+        </p:nvSpPr>
+        <p:spPr>
+          <a:xfrm>
+            <a:off x="6309360" y="3200400"/>
+            <a:ext cx="5212080" cy="548640"/>
+          </a:xfrm>
+          <a:prstGeom prst="rect">
+            <a:avLst/>
+          </a:prstGeom>
+          <a:noFill/>
+        </p:spPr>
+        <p:txBody>
+          <a:bodyPr wrap="square" anchor="t">
+            <a:spAutoFit/>
+          </a:bodyPr>
+          <a:lstStyle/>
+          <a:p>
+            <a:pPr algn="ctr">
+              <a:lnSpc>
+                <a:spcPct val="100000"/>
+              </a:lnSpc>
+            </a:pPr>
+            <a:r>
+              <a:rPr sz="1800" b="1">
+                <a:solidFill>
+                  <a:srgbClr val="00FF41"/>
+                </a:solidFill>
+                <a:latin typeface="Courier New"/>
+              </a:rPr>
+              <a:t>🖼  Result B</a:t>
+            </a:r>
+          </a:p>
+        </p:txBody>
+      </p:sp>
+      <p:sp>
+        <p:nvSpPr>
+          <p:cNvPr id="10" name="TextBox 9"/>
+          <p:cNvSpPr txBox="1"/>
+          <p:nvPr/>
+        </p:nvSpPr>
+        <p:spPr>
+          <a:xfrm>
+            <a:off x="6309360" y="3749039"/>
+            <a:ext cx="5212080" cy="548640"/>
+          </a:xfrm>
+          <a:prstGeom prst="rect">
+            <a:avLst/>
+          </a:prstGeom>
+          <a:noFill/>
+        </p:spPr>
+        <p:txBody>
+          <a:bodyPr wrap="square" anchor="t">
+            <a:spAutoFit/>
+          </a:bodyPr>
+          <a:lstStyle/>
+          <a:p>
+            <a:pPr algn="ctr">
+              <a:lnSpc>
+                <a:spcPct val="100000"/>
+              </a:lnSpc>
+            </a:pPr>
+            <a:r>
+              <a:rPr sz="1400" b="0">
+                <a:solidFill>
+                  <a:srgbClr val="8A94A6"/>
+                </a:solidFill>
+                <a:latin typeface="Arial"/>
+              </a:rPr>
+              <a:t>“A professional landing page.”</a:t>
+            </a:r>
+          </a:p>
+        </p:txBody>
+      </p:sp>
+      <p:sp>
+        <p:nvSpPr>
+          <p:cNvPr id="11" name="TextBox 10"/>
+          <p:cNvSpPr txBox="1"/>
+          <p:nvPr/>
+        </p:nvSpPr>
+        <p:spPr>
+          <a:xfrm>
+            <a:off x="640080" y="5029200"/>
+            <a:ext cx="10972800" cy="731520"/>
+          </a:xfrm>
+          <a:prstGeom prst="rect">
+            <a:avLst/>
+          </a:prstGeom>
+          <a:noFill/>
+        </p:spPr>
+        <p:txBody>
+          <a:bodyPr wrap="square" anchor="t">
+            <a:spAutoFit/>
+          </a:bodyPr>
+          <a:lstStyle/>
+          <a:p>
+            <a:pPr algn="l">
+              <a:lnSpc>
+                <a:spcPct val="100000"/>
+              </a:lnSpc>
+            </a:pPr>
+            <a:r>
+              <a:rPr sz="1800" b="1">
+                <a:solidFill>
+                  <a:srgbClr val="F5F7FA"/>
+                </a:solidFill>
+                <a:latin typeface="Arial"/>
+              </a:rPr>
+              <a:t>The question: why does “professional” often default to one specific layout or design?</a:t>
+            </a:r>
+          </a:p>
+        </p:txBody>
+      </p:sp>
+      <p:sp>
+        <p:nvSpPr>
+          <p:cNvPr id="12" name="TextBox 11"/>
+          <p:cNvSpPr txBox="1"/>
+          <p:nvPr/>
+        </p:nvSpPr>
+        <p:spPr>
+          <a:xfrm>
+            <a:off x="640080" y="6355080"/>
+            <a:ext cx="10972800" cy="365760"/>
+          </a:xfrm>
+          <a:prstGeom prst="rect">
+            <a:avLst/>
+          </a:prstGeom>
+          <a:noFill/>
+        </p:spPr>
+        <p:txBody>
+          <a:bodyPr wrap="square" anchor="t">
+            <a:spAutoFit/>
+          </a:bodyPr>
+          <a:lstStyle/>
+          <a:p>
+            <a:pPr algn="l">
+              <a:lnSpc>
+                <a:spcPct val="100000"/>
+              </a:lnSpc>
+            </a:pPr>
+            <a:r>
+              <a:rPr sz="1000" b="0">
+                <a:solidFill>
+                  <a:srgbClr val="5A6474"/>
+                </a:solidFill>
+                <a:latin typeface="Courier New"/>
+              </a:rPr>
+              <a:t>Good Code, Good Vibes · TECHIE 1121 · Cornell Tech · Summer 2026</a:t>
+            </a:r>
+          </a:p>
+        </p:txBody>
+      </p:sp>
+    </p:spTree>
+  </p:cSld>
+  <p:clrMapOvr>
+    <a:masterClrMapping/>
+  </p:clrMapOvr>
+</p:sld>
+</file>
+
+<file path=ppt/slides/slide11.xml><?xml version="1.0" encoding="utf-8"?>
+<p:sld xmlns:a="http://schemas.openxmlformats.org/drawingml/2006/main" xmlns:p="http://schemas.openxmlformats.org/presentationml/2006/main" xmlns:r="http://schemas.openxmlformats.org/officeDocument/2006/relationships">
+  <p:cSld>
+    <p:bg>
+      <p:bgPr>
+        <a:solidFill>
+          <a:srgbClr val="0B0E14"/>
+        </a:solidFill>
+        <a:effectLst/>
+      </p:bgPr>
+    </p:bg>
+    <p:spTree>
+      <p:nvGrpSpPr>
+        <p:cNvPr id="1" name=""/>
+        <p:cNvGrpSpPr/>
+        <p:nvPr/>
+      </p:nvGrpSpPr>
+      <p:grpSpPr/>
+      <p:sp>
+        <p:nvSpPr>
+          <p:cNvPr id="2" name="TextBox 1"/>
+          <p:cNvSpPr txBox="1"/>
+          <p:nvPr/>
+        </p:nvSpPr>
+        <p:spPr>
+          <a:xfrm>
+            <a:off x="640080" y="502920"/>
+            <a:ext cx="10058400" cy="365760"/>
+          </a:xfrm>
+          <a:prstGeom prst="rect">
+            <a:avLst/>
+          </a:prstGeom>
+          <a:noFill/>
+        </p:spPr>
+        <p:txBody>
+          <a:bodyPr wrap="square" anchor="t">
+            <a:spAutoFit/>
+          </a:bodyPr>
+          <a:lstStyle/>
+          <a:p>
+            <a:pPr algn="l">
+              <a:lnSpc>
+                <a:spcPct val="100000"/>
+              </a:lnSpc>
+            </a:pPr>
+            <a:r>
+              <a:rPr sz="1300" b="1">
+                <a:solidFill>
+                  <a:srgbClr val="00FF41"/>
+                </a:solidFill>
+                <a:latin typeface="Courier New"/>
+              </a:rPr>
+              <a:t>ACTIVITY</a:t>
+            </a:r>
+          </a:p>
+        </p:txBody>
+      </p:sp>
+      <p:sp>
+        <p:nvSpPr>
+          <p:cNvPr id="3" name="Rectangle 2"/>
+          <p:cNvSpPr/>
+          <p:nvPr/>
+        </p:nvSpPr>
+        <p:spPr>
+          <a:xfrm>
+            <a:off x="640080" y="932688"/>
+            <a:ext cx="822960" cy="73152"/>
+          </a:xfrm>
+          <a:prstGeom prst="rect">
+            <a:avLst/>
+          </a:prstGeom>
+          <a:solidFill>
+            <a:srgbClr val="00FF41"/>
+          </a:solidFill>
+          <a:ln>
+            <a:noFill/>
+          </a:ln>
+          <a:effectLst/>
+        </p:spPr>
+        <p:style>
+          <a:lnRef idx="1">
+            <a:schemeClr val="accent1"/>
+          </a:lnRef>
+          <a:fillRef idx="3">
+            <a:schemeClr val="accent1"/>
+          </a:fillRef>
+          <a:effectRef idx="2">
+            <a:schemeClr val="accent1"/>
+          </a:effectRef>
+          <a:fontRef idx="minor">
+            <a:schemeClr val="lt1"/>
+          </a:fontRef>
+        </p:style>
+        <p:txBody>
+          <a:bodyPr rtlCol="0" anchor="ctr"/>
+          <a:lstStyle/>
+          <a:p>
+            <a:pPr algn="ctr"/>
+          </a:p>
+        </p:txBody>
+      </p:sp>
+      <p:sp>
+        <p:nvSpPr>
+          <p:cNvPr id="4" name="TextBox 3"/>
+          <p:cNvSpPr txBox="1"/>
+          <p:nvPr/>
+        </p:nvSpPr>
+        <p:spPr>
+          <a:xfrm>
+            <a:off x="640080" y="1188720"/>
+            <a:ext cx="10972800" cy="1097280"/>
+          </a:xfrm>
+          <a:prstGeom prst="rect">
+            <a:avLst/>
+          </a:prstGeom>
+          <a:noFill/>
+        </p:spPr>
+        <p:txBody>
+          <a:bodyPr wrap="square" anchor="t">
+            <a:spAutoFit/>
+          </a:bodyPr>
+          <a:lstStyle/>
+          <a:p>
+            <a:pPr algn="l">
+              <a:lnSpc>
+                <a:spcPct val="100000"/>
+              </a:lnSpc>
+            </a:pPr>
+            <a:r>
+              <a:rPr sz="3400" b="1">
+                <a:solidFill>
+                  <a:srgbClr val="F5F7FA"/>
+                </a:solidFill>
+                <a:latin typeface="Arial"/>
+              </a:rPr>
+              <a:t>The cross-tool benchmark</a:t>
+            </a:r>
+          </a:p>
+        </p:txBody>
+      </p:sp>
+      <p:sp>
+        <p:nvSpPr>
+          <p:cNvPr id="5" name="TextBox 4"/>
+          <p:cNvSpPr txBox="1"/>
+          <p:nvPr/>
+        </p:nvSpPr>
+        <p:spPr>
+          <a:xfrm>
+            <a:off x="658368" y="2286000"/>
+            <a:ext cx="10881360" cy="3657600"/>
+          </a:xfrm>
+          <a:prstGeom prst="rect">
+            <a:avLst/>
+          </a:prstGeom>
+          <a:noFill/>
+        </p:spPr>
+        <p:txBody>
+          <a:bodyPr wrap="square" anchor="t">
+            <a:spAutoFit/>
+          </a:bodyPr>
+          <a:lstStyle/>
+          <a:p>
+            <a:pPr algn="l">
+              <a:lnSpc>
+                <a:spcPct val="112000"/>
+              </a:lnSpc>
+            </a:pPr>
+            <a:r>
+              <a:rPr sz="2000" b="1">
+                <a:solidFill>
+                  <a:srgbClr val="00FF41"/>
+                </a:solidFill>
+                <a:latin typeface="Arial"/>
+              </a:rPr>
+              <a:t>•  </a:t>
+            </a:r>
+            <a:r>
+              <a:rPr sz="2000" b="0">
+                <a:solidFill>
+                  <a:srgbClr val="F5F7FA"/>
+                </a:solidFill>
+                <a:latin typeface="Arial"/>
+              </a:rPr>
+              <a:t>The mission: run the SAME prompt across three different platforms.</a:t>
+            </a:r>
+          </a:p>
+          <a:p>
+            <a:pPr algn="l">
+              <a:lnSpc>
+                <a:spcPct val="112000"/>
+              </a:lnSpc>
+            </a:pPr>
+            <a:r>
+              <a:rPr sz="2000" b="1">
+                <a:solidFill>
+                  <a:srgbClr val="00FF41"/>
+                </a:solidFill>
+                <a:latin typeface="Arial"/>
+              </a:rPr>
+              <a:t>•  </a:t>
+            </a:r>
+            <a:r>
+              <a:rPr sz="2000" b="0">
+                <a:solidFill>
+                  <a:srgbClr val="F5F7FA"/>
+                </a:solidFill>
+                <a:latin typeface="Arial"/>
+              </a:rPr>
+              <a:t>The prompt: “Build a social networking profile page for a community organizer in a specific area you’re familiar with.”</a:t>
+            </a:r>
+          </a:p>
+          <a:p>
+            <a:pPr algn="l">
+              <a:lnSpc>
+                <a:spcPct val="112000"/>
+              </a:lnSpc>
+            </a:pPr>
+            <a:r>
+              <a:rPr sz="2000" b="1">
+                <a:solidFill>
+                  <a:srgbClr val="00FF41"/>
+                </a:solidFill>
+                <a:latin typeface="Arial"/>
+              </a:rPr>
+              <a:t>•  </a:t>
+            </a:r>
+            <a:r>
+              <a:rPr sz="2000" b="0">
+                <a:solidFill>
+                  <a:srgbClr val="F5F7FA"/>
+                </a:solidFill>
+                <a:latin typeface="Arial"/>
+              </a:rPr>
+              <a:t>Look for: did it use relevant imagery or icons?</a:t>
+            </a:r>
+          </a:p>
+          <a:p>
+            <a:pPr algn="l">
+              <a:lnSpc>
+                <a:spcPct val="112000"/>
+              </a:lnSpc>
+            </a:pPr>
+            <a:r>
+              <a:rPr sz="2000" b="1">
+                <a:solidFill>
+                  <a:srgbClr val="00FF41"/>
+                </a:solidFill>
+                <a:latin typeface="Arial"/>
+              </a:rPr>
+              <a:t>•  </a:t>
+            </a:r>
+            <a:r>
+              <a:rPr sz="2000" b="0">
+                <a:solidFill>
+                  <a:srgbClr val="F5F7FA"/>
+                </a:solidFill>
+                <a:latin typeface="Arial"/>
+              </a:rPr>
+              <a:t>Is the terminology correct for the location?</a:t>
+            </a:r>
+          </a:p>
+          <a:p>
+            <a:pPr algn="l">
+              <a:lnSpc>
+                <a:spcPct val="112000"/>
+              </a:lnSpc>
+            </a:pPr>
+            <a:r>
+              <a:rPr sz="2000" b="1">
+                <a:solidFill>
+                  <a:srgbClr val="00FF41"/>
+                </a:solidFill>
+                <a:latin typeface="Arial"/>
+              </a:rPr>
+              <a:t>•  </a:t>
+            </a:r>
+            <a:r>
+              <a:rPr sz="2000" b="0">
+                <a:solidFill>
+                  <a:srgbClr val="F5F7FA"/>
+                </a:solidFill>
+                <a:latin typeface="Arial"/>
+              </a:rPr>
+              <a:t>Does the wording or layout assume anything about who uses the site?</a:t>
+            </a:r>
+          </a:p>
+        </p:txBody>
+      </p:sp>
+      <p:sp>
+        <p:nvSpPr>
+          <p:cNvPr id="6" name="TextBox 5"/>
+          <p:cNvSpPr txBox="1"/>
+          <p:nvPr/>
+        </p:nvSpPr>
+        <p:spPr>
+          <a:xfrm>
+            <a:off x="640080" y="6355080"/>
+            <a:ext cx="10972800" cy="365760"/>
+          </a:xfrm>
+          <a:prstGeom prst="rect">
+            <a:avLst/>
+          </a:prstGeom>
+          <a:noFill/>
+        </p:spPr>
+        <p:txBody>
+          <a:bodyPr wrap="square" anchor="t">
+            <a:spAutoFit/>
+          </a:bodyPr>
+          <a:lstStyle/>
+          <a:p>
+            <a:pPr algn="l">
+              <a:lnSpc>
+                <a:spcPct val="100000"/>
+              </a:lnSpc>
+            </a:pPr>
+            <a:r>
+              <a:rPr sz="1000" b="0">
+                <a:solidFill>
+                  <a:srgbClr val="5A6474"/>
+                </a:solidFill>
+                <a:latin typeface="Courier New"/>
+              </a:rPr>
+              <a:t>Good Code, Good Vibes · TECHIE 1121 · Cornell Tech · Summer 2026</a:t>
+            </a:r>
+          </a:p>
+        </p:txBody>
+      </p:sp>
+    </p:spTree>
+  </p:cSld>
+  <p:clrMapOvr>
+    <a:masterClrMapping/>
+  </p:clrMapOvr>
+</p:sld>
+</file>
+
+<file path=ppt/slides/slide12.xml><?xml version="1.0" encoding="utf-8"?>
+<p:sld xmlns:a="http://schemas.openxmlformats.org/drawingml/2006/main" xmlns:p="http://schemas.openxmlformats.org/presentationml/2006/main" xmlns:r="http://schemas.openxmlformats.org/officeDocument/2006/relationships">
+  <p:cSld>
+    <p:bg>
+      <p:bgPr>
+        <a:solidFill>
+          <a:srgbClr val="0B0E14"/>
+        </a:solidFill>
+        <a:effectLst/>
+      </p:bgPr>
+    </p:bg>
+    <p:spTree>
+      <p:nvGrpSpPr>
+        <p:cNvPr id="1" name=""/>
+        <p:cNvGrpSpPr/>
+        <p:nvPr/>
+      </p:nvGrpSpPr>
+      <p:grpSpPr/>
+      <p:sp>
+        <p:nvSpPr>
+          <p:cNvPr id="2" name="TextBox 1"/>
+          <p:cNvSpPr txBox="1"/>
+          <p:nvPr/>
+        </p:nvSpPr>
+        <p:spPr>
+          <a:xfrm>
+            <a:off x="640080" y="502920"/>
+            <a:ext cx="10058400" cy="365760"/>
+          </a:xfrm>
+          <a:prstGeom prst="rect">
+            <a:avLst/>
+          </a:prstGeom>
+          <a:noFill/>
+        </p:spPr>
+        <p:txBody>
+          <a:bodyPr wrap="square" anchor="t">
+            <a:spAutoFit/>
+          </a:bodyPr>
+          <a:lstStyle/>
+          <a:p>
+            <a:pPr algn="l">
+              <a:lnSpc>
+                <a:spcPct val="100000"/>
+              </a:lnSpc>
+            </a:pPr>
+            <a:r>
+              <a:rPr sz="1300" b="1">
+                <a:solidFill>
+                  <a:srgbClr val="00FF41"/>
+                </a:solidFill>
+                <a:latin typeface="Courier New"/>
+              </a:rPr>
+              <a:t>AUDIT</a:t>
+            </a:r>
+          </a:p>
+        </p:txBody>
+      </p:sp>
+      <p:sp>
+        <p:nvSpPr>
+          <p:cNvPr id="3" name="Rectangle 2"/>
+          <p:cNvSpPr/>
+          <p:nvPr/>
+        </p:nvSpPr>
+        <p:spPr>
+          <a:xfrm>
+            <a:off x="640080" y="932688"/>
+            <a:ext cx="822960" cy="73152"/>
+          </a:xfrm>
+          <a:prstGeom prst="rect">
+            <a:avLst/>
+          </a:prstGeom>
+          <a:solidFill>
+            <a:srgbClr val="00FF41"/>
+          </a:solidFill>
+          <a:ln>
+            <a:noFill/>
+          </a:ln>
+          <a:effectLst/>
+        </p:spPr>
+        <p:style>
+          <a:lnRef idx="1">
+            <a:schemeClr val="accent1"/>
+          </a:lnRef>
+          <a:fillRef idx="3">
+            <a:schemeClr val="accent1"/>
+          </a:fillRef>
+          <a:effectRef idx="2">
+            <a:schemeClr val="accent1"/>
+          </a:effectRef>
+          <a:fontRef idx="minor">
+            <a:schemeClr val="lt1"/>
+          </a:fontRef>
+        </p:style>
+        <p:txBody>
+          <a:bodyPr rtlCol="0" anchor="ctr"/>
+          <a:lstStyle/>
+          <a:p>
+            <a:pPr algn="ctr"/>
+          </a:p>
+        </p:txBody>
+      </p:sp>
+      <p:sp>
+        <p:nvSpPr>
+          <p:cNvPr id="4" name="TextBox 3"/>
+          <p:cNvSpPr txBox="1"/>
+          <p:nvPr/>
+        </p:nvSpPr>
+        <p:spPr>
+          <a:xfrm>
+            <a:off x="640080" y="1188720"/>
+            <a:ext cx="10972800" cy="914400"/>
+          </a:xfrm>
+          <a:prstGeom prst="rect">
+            <a:avLst/>
+          </a:prstGeom>
+          <a:noFill/>
+        </p:spPr>
+        <p:txBody>
+          <a:bodyPr wrap="square" anchor="t">
+            <a:spAutoFit/>
+          </a:bodyPr>
+          <a:lstStyle/>
+          <a:p>
+            <a:pPr algn="l">
+              <a:lnSpc>
+                <a:spcPct val="100000"/>
+              </a:lnSpc>
+            </a:pPr>
+            <a:r>
+              <a:rPr sz="3200" b="1">
+                <a:solidFill>
+                  <a:srgbClr val="F5F7FA"/>
+                </a:solidFill>
+                <a:latin typeface="Arial"/>
+              </a:rPr>
+              <a:t>The Vibe Audit checklist</a:t>
+            </a:r>
+          </a:p>
+        </p:txBody>
+      </p:sp>
+      <p:sp>
+        <p:nvSpPr>
+          <p:cNvPr id="5" name="Rounded Rectangle 4"/>
+          <p:cNvSpPr/>
+          <p:nvPr/>
+        </p:nvSpPr>
+        <p:spPr>
+          <a:xfrm>
+            <a:off x="640080" y="2468880"/>
+            <a:ext cx="3393338" cy="3383280"/>
+          </a:xfrm>
+          <a:prstGeom prst="roundRect">
+            <a:avLst/>
+          </a:prstGeom>
+          <a:solidFill>
+            <a:srgbClr val="151B26"/>
+          </a:solidFill>
+          <a:ln>
+            <a:noFill/>
+          </a:ln>
+          <a:effectLst/>
+        </p:spPr>
+        <p:style>
+          <a:lnRef idx="1">
+            <a:schemeClr val="accent1"/>
+          </a:lnRef>
+          <a:fillRef idx="3">
+            <a:schemeClr val="accent1"/>
+          </a:fillRef>
+          <a:effectRef idx="2">
+            <a:schemeClr val="accent1"/>
+          </a:effectRef>
+          <a:fontRef idx="minor">
+            <a:schemeClr val="lt1"/>
+          </a:fontRef>
+        </p:style>
+        <p:txBody>
+          <a:bodyPr rtlCol="0" anchor="ctr"/>
+          <a:lstStyle/>
+          <a:p>
+            <a:pPr algn="ctr"/>
+          </a:p>
+        </p:txBody>
+      </p:sp>
+      <p:sp>
+        <p:nvSpPr>
+          <p:cNvPr id="6" name="Rectangle 5"/>
+          <p:cNvSpPr/>
+          <p:nvPr/>
+        </p:nvSpPr>
+        <p:spPr>
+          <a:xfrm>
+            <a:off x="640080" y="2468880"/>
+            <a:ext cx="3393338" cy="82296"/>
+          </a:xfrm>
+          <a:prstGeom prst="rect">
+            <a:avLst/>
+          </a:prstGeom>
+          <a:solidFill>
+            <a:srgbClr val="00FF41"/>
+          </a:solidFill>
+          <a:ln>
+            <a:noFill/>
+          </a:ln>
+          <a:effectLst/>
+        </p:spPr>
+        <p:style>
+          <a:lnRef idx="1">
+            <a:schemeClr val="accent1"/>
+          </a:lnRef>
+          <a:fillRef idx="3">
+            <a:schemeClr val="accent1"/>
+          </a:fillRef>
+          <a:effectRef idx="2">
+            <a:schemeClr val="accent1"/>
+          </a:effectRef>
+          <a:fontRef idx="minor">
+            <a:schemeClr val="lt1"/>
+          </a:fontRef>
+        </p:style>
+        <p:txBody>
+          <a:bodyPr rtlCol="0" anchor="ctr"/>
+          <a:lstStyle/>
+          <a:p>
+            <a:pPr algn="ctr"/>
+          </a:p>
+        </p:txBody>
+      </p:sp>
+      <p:sp>
+        <p:nvSpPr>
+          <p:cNvPr id="7" name="TextBox 6"/>
+          <p:cNvSpPr txBox="1"/>
+          <p:nvPr/>
+        </p:nvSpPr>
+        <p:spPr>
+          <a:xfrm>
+            <a:off x="914400" y="2788920"/>
+            <a:ext cx="2844698" cy="457200"/>
+          </a:xfrm>
+          <a:prstGeom prst="rect">
+            <a:avLst/>
+          </a:prstGeom>
+          <a:noFill/>
+        </p:spPr>
+        <p:txBody>
+          <a:bodyPr wrap="square" anchor="t">
+            <a:spAutoFit/>
+          </a:bodyPr>
+          <a:lstStyle/>
+          <a:p>
+            <a:pPr algn="l">
+              <a:lnSpc>
+                <a:spcPct val="100000"/>
+              </a:lnSpc>
+            </a:pPr>
+            <a:r>
+              <a:rPr sz="1200" b="1">
+                <a:solidFill>
+                  <a:srgbClr val="00FF41"/>
+                </a:solidFill>
+                <a:latin typeface="Courier New"/>
+              </a:rPr>
+              <a:t>REPRESENTATION</a:t>
+            </a:r>
+          </a:p>
+        </p:txBody>
+      </p:sp>
+      <p:sp>
+        <p:nvSpPr>
+          <p:cNvPr id="8" name="TextBox 7"/>
+          <p:cNvSpPr txBox="1"/>
+          <p:nvPr/>
+        </p:nvSpPr>
+        <p:spPr>
+          <a:xfrm>
+            <a:off x="914400" y="3246120"/>
+            <a:ext cx="2844698" cy="822960"/>
+          </a:xfrm>
+          <a:prstGeom prst="rect">
+            <a:avLst/>
+          </a:prstGeom>
+          <a:noFill/>
+        </p:spPr>
+        <p:txBody>
+          <a:bodyPr wrap="square" anchor="t">
+            <a:spAutoFit/>
+          </a:bodyPr>
+          <a:lstStyle/>
+          <a:p>
+            <a:pPr algn="l">
+              <a:lnSpc>
+                <a:spcPct val="100000"/>
+              </a:lnSpc>
+            </a:pPr>
+            <a:r>
+              <a:rPr sz="2000" b="1">
+                <a:solidFill>
+                  <a:srgbClr val="F5F7FA"/>
+                </a:solidFill>
+                <a:latin typeface="Arial"/>
+              </a:rPr>
+              <a:t>Who is this for?</a:t>
+            </a:r>
+          </a:p>
+        </p:txBody>
+      </p:sp>
+      <p:sp>
+        <p:nvSpPr>
+          <p:cNvPr id="9" name="TextBox 8"/>
+          <p:cNvSpPr txBox="1"/>
+          <p:nvPr/>
+        </p:nvSpPr>
+        <p:spPr>
+          <a:xfrm>
+            <a:off x="914400" y="4114800"/>
+            <a:ext cx="2844698" cy="1554480"/>
+          </a:xfrm>
+          <a:prstGeom prst="rect">
+            <a:avLst/>
+          </a:prstGeom>
+          <a:noFill/>
+        </p:spPr>
+        <p:txBody>
+          <a:bodyPr wrap="square" anchor="t">
+            <a:spAutoFit/>
+          </a:bodyPr>
+          <a:lstStyle/>
+          <a:p>
+            <a:pPr algn="l">
+              <a:lnSpc>
+                <a:spcPct val="110000"/>
+              </a:lnSpc>
+            </a:pPr>
+            <a:r>
+              <a:rPr sz="1500" b="0">
+                <a:solidFill>
+                  <a:srgbClr val="8A94A6"/>
+                </a:solidFill>
+                <a:latin typeface="Arial"/>
+              </a:rPr>
+              <a:t>Who is this interface designed for? Who might be left out or overlooked?</a:t>
+            </a:r>
+          </a:p>
+        </p:txBody>
+      </p:sp>
+      <p:sp>
+        <p:nvSpPr>
+          <p:cNvPr id="10" name="Rounded Rectangle 9"/>
+          <p:cNvSpPr/>
+          <p:nvPr/>
+        </p:nvSpPr>
+        <p:spPr>
+          <a:xfrm>
+            <a:off x="4399178" y="2468880"/>
+            <a:ext cx="3393338" cy="3383280"/>
+          </a:xfrm>
+          <a:prstGeom prst="roundRect">
+            <a:avLst/>
+          </a:prstGeom>
+          <a:solidFill>
+            <a:srgbClr val="151B26"/>
+          </a:solidFill>
+          <a:ln>
+            <a:noFill/>
+          </a:ln>
+          <a:effectLst/>
+        </p:spPr>
+        <p:style>
+          <a:lnRef idx="1">
+            <a:schemeClr val="accent1"/>
+          </a:lnRef>
+          <a:fillRef idx="3">
+            <a:schemeClr val="accent1"/>
+          </a:fillRef>
+          <a:effectRef idx="2">
+            <a:schemeClr val="accent1"/>
+          </a:effectRef>
+          <a:fontRef idx="minor">
+            <a:schemeClr val="lt1"/>
+          </a:fontRef>
+        </p:style>
+        <p:txBody>
+          <a:bodyPr rtlCol="0" anchor="ctr"/>
+          <a:lstStyle/>
+          <a:p>
+            <a:pPr algn="ctr"/>
+          </a:p>
+        </p:txBody>
+      </p:sp>
+      <p:sp>
+        <p:nvSpPr>
+          <p:cNvPr id="11" name="Rectangle 10"/>
+          <p:cNvSpPr/>
+          <p:nvPr/>
+        </p:nvSpPr>
+        <p:spPr>
+          <a:xfrm>
+            <a:off x="4399178" y="2468880"/>
+            <a:ext cx="3393338" cy="82296"/>
+          </a:xfrm>
+          <a:prstGeom prst="rect">
+            <a:avLst/>
+          </a:prstGeom>
+          <a:solidFill>
+            <a:srgbClr val="00FF41"/>
+          </a:solidFill>
+          <a:ln>
+            <a:noFill/>
+          </a:ln>
+          <a:effectLst/>
+        </p:spPr>
+        <p:style>
+          <a:lnRef idx="1">
+            <a:schemeClr val="accent1"/>
+          </a:lnRef>
+          <a:fillRef idx="3">
+            <a:schemeClr val="accent1"/>
+          </a:fillRef>
+          <a:effectRef idx="2">
+            <a:schemeClr val="accent1"/>
+          </a:effectRef>
+          <a:fontRef idx="minor">
+            <a:schemeClr val="lt1"/>
+          </a:fontRef>
+        </p:style>
+        <p:txBody>
+          <a:bodyPr rtlCol="0" anchor="ctr"/>
+          <a:lstStyle/>
+          <a:p>
+            <a:pPr algn="ctr"/>
+          </a:p>
+        </p:txBody>
+      </p:sp>
+      <p:sp>
+        <p:nvSpPr>
+          <p:cNvPr id="12" name="TextBox 11"/>
+          <p:cNvSpPr txBox="1"/>
+          <p:nvPr/>
+        </p:nvSpPr>
+        <p:spPr>
+          <a:xfrm>
+            <a:off x="4673498" y="2788920"/>
+            <a:ext cx="2844698" cy="457200"/>
+          </a:xfrm>
+          <a:prstGeom prst="rect">
+            <a:avLst/>
+          </a:prstGeom>
+          <a:noFill/>
+        </p:spPr>
+        <p:txBody>
+          <a:bodyPr wrap="square" anchor="t">
+            <a:spAutoFit/>
+          </a:bodyPr>
+          <a:lstStyle/>
+          <a:p>
+            <a:pPr algn="l">
+              <a:lnSpc>
+                <a:spcPct val="100000"/>
+              </a:lnSpc>
+            </a:pPr>
+            <a:r>
+              <a:rPr sz="1200" b="1">
+                <a:solidFill>
+                  <a:srgbClr val="00FF41"/>
+                </a:solidFill>
+                <a:latin typeface="Courier New"/>
+              </a:rPr>
+              <a:t>ACCESSIBILITY</a:t>
+            </a:r>
+          </a:p>
+        </p:txBody>
+      </p:sp>
+      <p:sp>
+        <p:nvSpPr>
+          <p:cNvPr id="13" name="TextBox 12"/>
+          <p:cNvSpPr txBox="1"/>
+          <p:nvPr/>
+        </p:nvSpPr>
+        <p:spPr>
+          <a:xfrm>
+            <a:off x="4673498" y="3246120"/>
+            <a:ext cx="2844698" cy="822960"/>
+          </a:xfrm>
+          <a:prstGeom prst="rect">
+            <a:avLst/>
+          </a:prstGeom>
+          <a:noFill/>
+        </p:spPr>
+        <p:txBody>
+          <a:bodyPr wrap="square" anchor="t">
+            <a:spAutoFit/>
+          </a:bodyPr>
+          <a:lstStyle/>
+          <a:p>
+            <a:pPr algn="l">
+              <a:lnSpc>
+                <a:spcPct val="100000"/>
+              </a:lnSpc>
+            </a:pPr>
+            <a:r>
+              <a:rPr sz="2000" b="1">
+                <a:solidFill>
+                  <a:srgbClr val="F5F7FA"/>
+                </a:solidFill>
+                <a:latin typeface="Arial"/>
+              </a:rPr>
+              <a:t>Does it meet the bar?</a:t>
+            </a:r>
+          </a:p>
+        </p:txBody>
+      </p:sp>
+      <p:sp>
+        <p:nvSpPr>
+          <p:cNvPr id="14" name="TextBox 13"/>
+          <p:cNvSpPr txBox="1"/>
+          <p:nvPr/>
+        </p:nvSpPr>
+        <p:spPr>
+          <a:xfrm>
+            <a:off x="4673498" y="4114800"/>
+            <a:ext cx="2844698" cy="1554480"/>
+          </a:xfrm>
+          <a:prstGeom prst="rect">
+            <a:avLst/>
+          </a:prstGeom>
+          <a:noFill/>
+        </p:spPr>
+        <p:txBody>
+          <a:bodyPr wrap="square" anchor="t">
+            <a:spAutoFit/>
+          </a:bodyPr>
+          <a:lstStyle/>
+          <a:p>
+            <a:pPr algn="l">
+              <a:lnSpc>
+                <a:spcPct val="110000"/>
+              </a:lnSpc>
+            </a:pPr>
+            <a:r>
+              <a:rPr sz="1500" b="0">
+                <a:solidFill>
+                  <a:srgbClr val="8A94A6"/>
+                </a:solidFill>
+                <a:latin typeface="Arial"/>
+              </a:rPr>
+              <a:t>Color contrast, readability, clear navigation — basic accessibility standards.</a:t>
+            </a:r>
+          </a:p>
+        </p:txBody>
+      </p:sp>
+      <p:sp>
+        <p:nvSpPr>
+          <p:cNvPr id="15" name="Rounded Rectangle 14"/>
+          <p:cNvSpPr/>
+          <p:nvPr/>
+        </p:nvSpPr>
+        <p:spPr>
+          <a:xfrm>
+            <a:off x="8158276" y="2468880"/>
+            <a:ext cx="3393338" cy="3383280"/>
+          </a:xfrm>
+          <a:prstGeom prst="roundRect">
+            <a:avLst/>
+          </a:prstGeom>
+          <a:solidFill>
+            <a:srgbClr val="151B26"/>
+          </a:solidFill>
+          <a:ln>
+            <a:noFill/>
+          </a:ln>
+          <a:effectLst/>
+        </p:spPr>
+        <p:style>
+          <a:lnRef idx="1">
+            <a:schemeClr val="accent1"/>
+          </a:lnRef>
+          <a:fillRef idx="3">
+            <a:schemeClr val="accent1"/>
+          </a:fillRef>
+          <a:effectRef idx="2">
+            <a:schemeClr val="accent1"/>
+          </a:effectRef>
+          <a:fontRef idx="minor">
+            <a:schemeClr val="lt1"/>
+          </a:fontRef>
+        </p:style>
+        <p:txBody>
+          <a:bodyPr rtlCol="0" anchor="ctr"/>
+          <a:lstStyle/>
+          <a:p>
+            <a:pPr algn="ctr"/>
+          </a:p>
+        </p:txBody>
+      </p:sp>
+      <p:sp>
+        <p:nvSpPr>
+          <p:cNvPr id="16" name="Rectangle 15"/>
+          <p:cNvSpPr/>
+          <p:nvPr/>
+        </p:nvSpPr>
+        <p:spPr>
+          <a:xfrm>
+            <a:off x="8158276" y="2468880"/>
+            <a:ext cx="3393338" cy="82296"/>
+          </a:xfrm>
+          <a:prstGeom prst="rect">
+            <a:avLst/>
+          </a:prstGeom>
+          <a:solidFill>
+            <a:srgbClr val="00FF41"/>
+          </a:solidFill>
+          <a:ln>
+            <a:noFill/>
+          </a:ln>
+          <a:effectLst/>
+        </p:spPr>
+        <p:style>
+          <a:lnRef idx="1">
+            <a:schemeClr val="accent1"/>
+          </a:lnRef>
+          <a:fillRef idx="3">
+            <a:schemeClr val="accent1"/>
+          </a:fillRef>
+          <a:effectRef idx="2">
+            <a:schemeClr val="accent1"/>
+          </a:effectRef>
+          <a:fontRef idx="minor">
+            <a:schemeClr val="lt1"/>
+          </a:fontRef>
+        </p:style>
+        <p:txBody>
+          <a:bodyPr rtlCol="0" anchor="ctr"/>
+          <a:lstStyle/>
+          <a:p>
+            <a:pPr algn="ctr"/>
+          </a:p>
+        </p:txBody>
+      </p:sp>
+      <p:sp>
+        <p:nvSpPr>
+          <p:cNvPr id="17" name="TextBox 16"/>
+          <p:cNvSpPr txBox="1"/>
+          <p:nvPr/>
+        </p:nvSpPr>
+        <p:spPr>
+          <a:xfrm>
+            <a:off x="8432596" y="2788920"/>
+            <a:ext cx="2844698" cy="457200"/>
+          </a:xfrm>
+          <a:prstGeom prst="rect">
+            <a:avLst/>
+          </a:prstGeom>
+          <a:noFill/>
+        </p:spPr>
+        <p:txBody>
+          <a:bodyPr wrap="square" anchor="t">
+            <a:spAutoFit/>
+          </a:bodyPr>
+          <a:lstStyle/>
+          <a:p>
+            <a:pPr algn="l">
+              <a:lnSpc>
+                <a:spcPct val="100000"/>
+              </a:lnSpc>
+            </a:pPr>
+            <a:r>
+              <a:rPr sz="1200" b="1">
+                <a:solidFill>
+                  <a:srgbClr val="00FF41"/>
+                </a:solidFill>
+                <a:latin typeface="Courier New"/>
+              </a:rPr>
+              <a:t>ASSUMPTIONS</a:t>
+            </a:r>
+          </a:p>
+        </p:txBody>
+      </p:sp>
+      <p:sp>
+        <p:nvSpPr>
+          <p:cNvPr id="18" name="TextBox 17"/>
+          <p:cNvSpPr txBox="1"/>
+          <p:nvPr/>
+        </p:nvSpPr>
+        <p:spPr>
+          <a:xfrm>
+            <a:off x="8432596" y="3246120"/>
+            <a:ext cx="2844698" cy="822960"/>
+          </a:xfrm>
+          <a:prstGeom prst="rect">
+            <a:avLst/>
+          </a:prstGeom>
+          <a:noFill/>
+        </p:spPr>
+        <p:txBody>
+          <a:bodyPr wrap="square" anchor="t">
+            <a:spAutoFit/>
+          </a:bodyPr>
+          <a:lstStyle/>
+          <a:p>
+            <a:pPr algn="l">
+              <a:lnSpc>
+                <a:spcPct val="100000"/>
+              </a:lnSpc>
+            </a:pPr>
+            <a:r>
+              <a:rPr sz="2000" b="1">
+                <a:solidFill>
+                  <a:srgbClr val="F5F7FA"/>
+                </a:solidFill>
+                <a:latin typeface="Arial"/>
+              </a:rPr>
+              <a:t>What’s baked in?</a:t>
+            </a:r>
+          </a:p>
+        </p:txBody>
+      </p:sp>
+      <p:sp>
+        <p:nvSpPr>
+          <p:cNvPr id="19" name="TextBox 18"/>
+          <p:cNvSpPr txBox="1"/>
+          <p:nvPr/>
+        </p:nvSpPr>
+        <p:spPr>
+          <a:xfrm>
+            <a:off x="8432596" y="4114800"/>
+            <a:ext cx="2844698" cy="1554480"/>
+          </a:xfrm>
+          <a:prstGeom prst="rect">
+            <a:avLst/>
+          </a:prstGeom>
+          <a:noFill/>
+        </p:spPr>
+        <p:txBody>
+          <a:bodyPr wrap="square" anchor="t">
+            <a:spAutoFit/>
+          </a:bodyPr>
+          <a:lstStyle/>
+          <a:p>
+            <a:pPr algn="l">
+              <a:lnSpc>
+                <a:spcPct val="110000"/>
+              </a:lnSpc>
+            </a:pPr>
+            <a:r>
+              <a:rPr sz="1500" b="0">
+                <a:solidFill>
+                  <a:srgbClr val="8A94A6"/>
+                </a:solidFill>
+                <a:latin typeface="Arial"/>
+              </a:rPr>
+              <a:t>What does the design assume — payment access, name formats, language?</a:t>
+            </a:r>
+          </a:p>
+        </p:txBody>
+      </p:sp>
+      <p:sp>
+        <p:nvSpPr>
+          <p:cNvPr id="20" name="TextBox 19"/>
+          <p:cNvSpPr txBox="1"/>
+          <p:nvPr/>
+        </p:nvSpPr>
+        <p:spPr>
+          <a:xfrm>
+            <a:off x="640080" y="6355080"/>
+            <a:ext cx="10972800" cy="365760"/>
+          </a:xfrm>
+          <a:prstGeom prst="rect">
+            <a:avLst/>
+          </a:prstGeom>
+          <a:noFill/>
+        </p:spPr>
+        <p:txBody>
+          <a:bodyPr wrap="square" anchor="t">
+            <a:spAutoFit/>
+          </a:bodyPr>
+          <a:lstStyle/>
+          <a:p>
+            <a:pPr algn="l">
+              <a:lnSpc>
+                <a:spcPct val="100000"/>
+              </a:lnSpc>
+            </a:pPr>
+            <a:r>
+              <a:rPr sz="1000" b="0">
+                <a:solidFill>
+                  <a:srgbClr val="5A6474"/>
+                </a:solidFill>
+                <a:latin typeface="Courier New"/>
+              </a:rPr>
+              <a:t>Good Code, Good Vibes · TECHIE 1121 · Cornell Tech · Summer 2026</a:t>
+            </a:r>
+          </a:p>
+        </p:txBody>
+      </p:sp>
+    </p:spTree>
+  </p:cSld>
+  <p:clrMapOvr>
+    <a:masterClrMapping/>
+  </p:clrMapOvr>
+</p:sld>
+</file>
+
+<file path=ppt/slides/slide13.xml><?xml version="1.0" encoding="utf-8"?>
+<p:sld xmlns:a="http://schemas.openxmlformats.org/drawingml/2006/main" xmlns:p="http://schemas.openxmlformats.org/presentationml/2006/main" xmlns:r="http://schemas.openxmlformats.org/officeDocument/2006/relationships">
+  <p:cSld>
+    <p:bg>
+      <p:bgPr>
+        <a:solidFill>
+          <a:srgbClr val="0B0E14"/>
+        </a:solidFill>
+        <a:effectLst/>
+      </p:bgPr>
+    </p:bg>
+    <p:spTree>
+      <p:nvGrpSpPr>
+        <p:cNvPr id="1" name=""/>
+        <p:cNvGrpSpPr/>
+        <p:nvPr/>
+      </p:nvGrpSpPr>
+      <p:grpSpPr/>
+      <p:sp>
+        <p:nvSpPr>
+          <p:cNvPr id="2" name="TextBox 1"/>
+          <p:cNvSpPr txBox="1"/>
+          <p:nvPr/>
+        </p:nvSpPr>
+        <p:spPr>
+          <a:xfrm>
+            <a:off x="640080" y="502920"/>
+            <a:ext cx="10058400" cy="365760"/>
+          </a:xfrm>
+          <a:prstGeom prst="rect">
+            <a:avLst/>
+          </a:prstGeom>
+          <a:noFill/>
+        </p:spPr>
+        <p:txBody>
+          <a:bodyPr wrap="square" anchor="t">
+            <a:spAutoFit/>
+          </a:bodyPr>
+          <a:lstStyle/>
+          <a:p>
+            <a:pPr algn="l">
+              <a:lnSpc>
+                <a:spcPct val="100000"/>
+              </a:lnSpc>
+            </a:pPr>
+            <a:r>
+              <a:rPr sz="1300" b="1">
+                <a:solidFill>
+                  <a:srgbClr val="00FF41"/>
+                </a:solidFill>
+                <a:latin typeface="Courier New"/>
+              </a:rPr>
               <a:t>STRATEGIES</a:t>
             </a:r>
           </a:p>
@@ -6706,21 +8532,65 @@
                 </a:solidFill>
                 <a:latin typeface="Courier New"/>
               </a:rPr>
-              <a:t>TRANSITION</a:t>
-            </a:r>
-          </a:p>
-        </p:txBody>
-      </p:sp>
-      <p:sp>
-        <p:nvSpPr>
-          <p:cNvPr id="3" name="TextBox 2"/>
+              <a:t>HIDDEN RULES</a:t>
+            </a:r>
+          </a:p>
+        </p:txBody>
+      </p:sp>
+      <p:sp>
+        <p:nvSpPr>
+          <p:cNvPr id="3" name="Rectangle 2"/>
+          <p:cNvSpPr/>
+          <p:nvPr/>
+        </p:nvSpPr>
+        <p:spPr>
+          <a:xfrm>
+            <a:off x="640080" y="932688"/>
+            <a:ext cx="822960" cy="73152"/>
+          </a:xfrm>
+          <a:prstGeom prst="rect">
+            <a:avLst/>
+          </a:prstGeom>
+          <a:solidFill>
+            <a:srgbClr val="00FF41"/>
+          </a:solidFill>
+          <a:ln>
+            <a:noFill/>
+          </a:ln>
+          <a:effectLst/>
+        </p:spPr>
+        <p:style>
+          <a:lnRef idx="1">
+            <a:schemeClr val="accent1"/>
+          </a:lnRef>
+          <a:fillRef idx="3">
+            <a:schemeClr val="accent1"/>
+          </a:fillRef>
+          <a:effectRef idx="2">
+            <a:schemeClr val="accent1"/>
+          </a:effectRef>
+          <a:fontRef idx="minor">
+            <a:schemeClr val="lt1"/>
+          </a:fontRef>
+        </p:style>
+        <p:txBody>
+          <a:bodyPr rtlCol="0" anchor="ctr"/>
+          <a:lstStyle/>
+          <a:p>
+            <a:pPr algn="ctr"/>
+          </a:p>
+        </p:txBody>
+      </p:sp>
+      <p:sp>
+        <p:nvSpPr>
+          <p:cNvPr id="4" name="TextBox 3"/>
           <p:cNvSpPr txBox="1"/>
           <p:nvPr/>
         </p:nvSpPr>
         <p:spPr>
           <a:xfrm>
-            <a:off x="1097280" y="548640"/>
-            <a:ext cx="2743200" cy="1828800"/>
+            <a:off x="640080" y="1188720"/>
+            <a:ext cx="10972800" cy="914400"/>
           </a:xfrm>
           <a:prstGeom prst="rect">
             <a:avLst/>
@@ -6739,27 +8609,27 @@
               </a:lnSpc>
             </a:pPr>
             <a:r>
-              <a:rPr sz="12000" b="1">
-                <a:solidFill>
-                  <a:srgbClr val="00FF41"/>
+              <a:rPr sz="3000" b="1">
+                <a:solidFill>
+                  <a:srgbClr val="F5F7FA"/>
                 </a:solidFill>
                 <a:latin typeface="Arial"/>
               </a:rPr>
-              <a:t>?</a:t>
-            </a:r>
-          </a:p>
-        </p:txBody>
-      </p:sp>
-      <p:sp>
-        <p:nvSpPr>
-          <p:cNvPr id="4" name="TextBox 3"/>
+              <a:t>System prompts — the rules you never see</a:t>
+            </a:r>
+          </a:p>
+        </p:txBody>
+      </p:sp>
+      <p:sp>
+        <p:nvSpPr>
+          <p:cNvPr id="5" name="TextBox 4"/>
           <p:cNvSpPr txBox="1"/>
           <p:nvPr/>
         </p:nvSpPr>
         <p:spPr>
           <a:xfrm>
-            <a:off x="1097280" y="2743200"/>
-            <a:ext cx="10058400" cy="3108960"/>
+            <a:off x="658368" y="2148840"/>
+            <a:ext cx="5577840" cy="3657600"/>
           </a:xfrm>
           <a:prstGeom prst="rect">
             <a:avLst/>
@@ -6774,24 +8644,210 @@
           <a:p>
             <a:pPr algn="l">
               <a:lnSpc>
-                <a:spcPct val="112000"/>
-              </a:lnSpc>
-            </a:pPr>
-            <a:r>
-              <a:rPr sz="3000" b="1">
+                <a:spcPct val="120000"/>
+              </a:lnSpc>
+            </a:pPr>
+            <a:r>
+              <a:rPr sz="1700" b="1">
+                <a:solidFill>
+                  <a:srgbClr val="00FF41"/>
+                </a:solidFill>
+                <a:latin typeface="Arial"/>
+              </a:rPr>
+              <a:t>•  </a:t>
+            </a:r>
+            <a:r>
+              <a:rPr sz="1700" b="0">
                 <a:solidFill>
                   <a:srgbClr val="F5F7FA"/>
                 </a:solidFill>
                 <a:latin typeface="Arial"/>
               </a:rPr>
-              <a:t>Time for some activities.</a:t>
-            </a:r>
-          </a:p>
-        </p:txBody>
-      </p:sp>
-      <p:sp>
-        <p:nvSpPr>
-          <p:cNvPr id="5" name="TextBox 4"/>
+              <a:t>Before your words reach the model, its maker invisibly prepends thousands of words of instructions.</a:t>
+            </a:r>
+          </a:p>
+          <a:p>
+            <a:pPr algn="l">
+              <a:lnSpc>
+                <a:spcPct val="120000"/>
+              </a:lnSpc>
+            </a:pPr>
+            <a:r>
+              <a:rPr sz="1700" b="1">
+                <a:solidFill>
+                  <a:srgbClr val="00FF41"/>
+                </a:solidFill>
+                <a:latin typeface="Arial"/>
+              </a:rPr>
+              <a:t>•  </a:t>
+            </a:r>
+            <a:r>
+              <a:rPr sz="1700" b="0">
+                <a:solidFill>
+                  <a:srgbClr val="F5F7FA"/>
+                </a:solidFill>
+                <a:latin typeface="Arial"/>
+              </a:rPr>
+              <a:t>The system prompt outranks you — it “can sometimes override a person’s request.”</a:t>
+            </a:r>
+          </a:p>
+          <a:p>
+            <a:pPr algn="l">
+              <a:lnSpc>
+                <a:spcPct val="120000"/>
+              </a:lnSpc>
+            </a:pPr>
+            <a:r>
+              <a:rPr sz="1700" b="1">
+                <a:solidFill>
+                  <a:srgbClr val="00FF41"/>
+                </a:solidFill>
+                <a:latin typeface="Arial"/>
+              </a:rPr>
+              <a:t>•  </a:t>
+            </a:r>
+            <a:r>
+              <a:rPr sz="1700" b="0">
+                <a:solidFill>
+                  <a:srgbClr val="F5F7FA"/>
+                </a:solidFill>
+                <a:latin typeface="Arial"/>
+              </a:rPr>
+              <a:t>It’s plain natural language: cheap, instant behavior fixes without retraining.</a:t>
+            </a:r>
+          </a:p>
+          <a:p>
+            <a:pPr algn="l">
+              <a:lnSpc>
+                <a:spcPct val="120000"/>
+              </a:lnSpc>
+            </a:pPr>
+            <a:r>
+              <a:rPr sz="1700" b="1">
+                <a:solidFill>
+                  <a:srgbClr val="00FF41"/>
+                </a:solidFill>
+                <a:latin typeface="Arial"/>
+              </a:rPr>
+              <a:t>•  </a:t>
+            </a:r>
+            <a:r>
+              <a:rPr sz="1700" b="0">
+                <a:solidFill>
+                  <a:srgbClr val="F5F7FA"/>
+                </a:solidFill>
+                <a:latin typeface="Arial"/>
+              </a:rPr>
+              <a:t>Really: OpenAI’s Codex was told “Never talk about goblins, gremlins, raccoons, trolls…” — a real fix to a real bug.</a:t>
+            </a:r>
+          </a:p>
+        </p:txBody>
+      </p:sp>
+      <p:pic>
+        <p:nvPicPr>
+          <p:cNvPr id="6" name="Picture 5" descr="wapo-system-prompts.jpg"/>
+          <p:cNvPicPr>
+            <a:picLocks noChangeAspect="1"/>
+          </p:cNvPicPr>
+          <p:nvPr/>
+        </p:nvPicPr>
+        <p:blipFill>
+          <a:blip r:embed="rId2"/>
+          <a:stretch>
+            <a:fillRect/>
+          </a:stretch>
+        </p:blipFill>
+        <p:spPr>
+          <a:xfrm>
+            <a:off x="6492240" y="2148840"/>
+            <a:ext cx="5029200" cy="3356991"/>
+          </a:xfrm>
+          <a:prstGeom prst="rect">
+            <a:avLst/>
+          </a:prstGeom>
+        </p:spPr>
+      </p:pic>
+      <p:sp>
+        <p:nvSpPr>
+          <p:cNvPr id="7" name="TextBox 6"/>
+          <p:cNvSpPr txBox="1"/>
+          <p:nvPr/>
+        </p:nvSpPr>
+        <p:spPr>
+          <a:xfrm>
+            <a:off x="6492240" y="5596128"/>
+            <a:ext cx="5029200" cy="365760"/>
+          </a:xfrm>
+          <a:prstGeom prst="rect">
+            <a:avLst/>
+          </a:prstGeom>
+          <a:noFill/>
+        </p:spPr>
+        <p:txBody>
+          <a:bodyPr wrap="square" anchor="t">
+            <a:spAutoFit/>
+          </a:bodyPr>
+          <a:lstStyle/>
+          <a:p>
+            <a:pPr algn="l">
+              <a:lnSpc>
+                <a:spcPct val="100000"/>
+              </a:lnSpc>
+            </a:pPr>
+            <a:r>
+              <a:rPr sz="1000" b="0">
+                <a:solidFill>
+                  <a:srgbClr val="5A6474"/>
+                </a:solidFill>
+                <a:latin typeface="Courier New"/>
+              </a:rPr>
+              <a:t>Illustration: The Washington Post</a:t>
+            </a:r>
+          </a:p>
+        </p:txBody>
+      </p:sp>
+      <p:sp>
+        <p:nvSpPr>
+          <p:cNvPr id="8" name="TextBox 7"/>
+          <p:cNvSpPr txBox="1"/>
+          <p:nvPr/>
+        </p:nvSpPr>
+        <p:spPr>
+          <a:xfrm>
+            <a:off x="640080" y="6053328"/>
+            <a:ext cx="10972800" cy="320040"/>
+          </a:xfrm>
+          <a:prstGeom prst="rect">
+            <a:avLst/>
+          </a:prstGeom>
+          <a:noFill/>
+        </p:spPr>
+        <p:txBody>
+          <a:bodyPr wrap="square" anchor="t">
+            <a:spAutoFit/>
+          </a:bodyPr>
+          <a:lstStyle/>
+          <a:p>
+            <a:pPr algn="l">
+              <a:lnSpc>
+                <a:spcPct val="100000"/>
+              </a:lnSpc>
+            </a:pPr>
+            <a:r>
+              <a:rPr sz="1050" b="0">
+                <a:solidFill>
+                  <a:srgbClr val="5A6474"/>
+                </a:solidFill>
+                <a:latin typeface="Courier New"/>
+              </a:rPr>
+              <a:t>Source: Kevin Schaul, “See the hidden rules behind AI”, The Washington Post, May 11 2026</a:t>
+            </a:r>
+          </a:p>
+        </p:txBody>
+      </p:sp>
+      <p:sp>
+        <p:nvSpPr>
+          <p:cNvPr id="9" name="TextBox 8"/>
           <p:cNvSpPr txBox="1"/>
           <p:nvPr/>
         </p:nvSpPr>
@@ -6888,7 +8944,7 @@
                 </a:solidFill>
                 <a:latin typeface="Courier New"/>
               </a:rPr>
-              <a:t>CASE STUDY</a:t>
+              <a:t>HIDDEN RULES</a:t>
             </a:r>
           </a:p>
         </p:txBody>
@@ -6971,7 +9027,7 @@
                 </a:solidFill>
                 <a:latin typeface="Arial"/>
               </a:rPr>
-              <a:t>Case study: “Make it Professional”</a:t>
+              <a:t>What the hidden words are spent on</a:t>
             </a:r>
           </a:p>
         </p:txBody>
@@ -6984,8 +9040,8 @@
         </p:nvSpPr>
         <p:spPr>
           <a:xfrm>
-            <a:off x="640080" y="2377440"/>
-            <a:ext cx="5212080" cy="2377440"/>
+            <a:off x="640080" y="2468880"/>
+            <a:ext cx="3393338" cy="3383280"/>
           </a:xfrm>
           <a:prstGeom prst="roundRect">
             <a:avLst/>
@@ -6993,11 +9049,8 @@
           <a:solidFill>
             <a:srgbClr val="151B26"/>
           </a:solidFill>
-          <a:ln w="15240">
-            <a:solidFill>
-              <a:srgbClr val="00FF41"/>
-            </a:solidFill>
-            <a:prstDash val="dash"/>
+          <a:ln>
+            <a:noFill/>
           </a:ln>
           <a:effectLst/>
         </p:spPr>
@@ -7025,104 +9078,23 @@
       </p:sp>
       <p:sp>
         <p:nvSpPr>
-          <p:cNvPr id="6" name="TextBox 5"/>
-          <p:cNvSpPr txBox="1"/>
-          <p:nvPr/>
-        </p:nvSpPr>
-        <p:spPr>
-          <a:xfrm>
-            <a:off x="640080" y="3200400"/>
-            <a:ext cx="5212080" cy="548640"/>
-          </a:xfrm>
-          <a:prstGeom prst="rect">
-            <a:avLst/>
-          </a:prstGeom>
-          <a:noFill/>
-        </p:spPr>
-        <p:txBody>
-          <a:bodyPr wrap="square" anchor="t">
-            <a:spAutoFit/>
-          </a:bodyPr>
-          <a:lstStyle/>
-          <a:p>
-            <a:pPr algn="ctr">
-              <a:lnSpc>
-                <a:spcPct val="100000"/>
-              </a:lnSpc>
-            </a:pPr>
-            <a:r>
-              <a:rPr sz="1800" b="1">
-                <a:solidFill>
-                  <a:srgbClr val="00FF41"/>
-                </a:solidFill>
-                <a:latin typeface="Courier New"/>
-              </a:rPr>
-              <a:t>🖼  Result A</a:t>
-            </a:r>
-          </a:p>
-        </p:txBody>
-      </p:sp>
-      <p:sp>
-        <p:nvSpPr>
-          <p:cNvPr id="7" name="TextBox 6"/>
-          <p:cNvSpPr txBox="1"/>
-          <p:nvPr/>
-        </p:nvSpPr>
-        <p:spPr>
-          <a:xfrm>
-            <a:off x="640080" y="3749039"/>
-            <a:ext cx="5212080" cy="548640"/>
-          </a:xfrm>
-          <a:prstGeom prst="rect">
-            <a:avLst/>
-          </a:prstGeom>
-          <a:noFill/>
-        </p:spPr>
-        <p:txBody>
-          <a:bodyPr wrap="square" anchor="t">
-            <a:spAutoFit/>
-          </a:bodyPr>
-          <a:lstStyle/>
-          <a:p>
-            <a:pPr algn="ctr">
-              <a:lnSpc>
-                <a:spcPct val="100000"/>
-              </a:lnSpc>
-            </a:pPr>
-            <a:r>
-              <a:rPr sz="1400" b="0">
-                <a:solidFill>
-                  <a:srgbClr val="8A94A6"/>
-                </a:solidFill>
-                <a:latin typeface="Arial"/>
-              </a:rPr>
-              <a:t>“A standard landing page.”</a:t>
-            </a:r>
-          </a:p>
-        </p:txBody>
-      </p:sp>
-      <p:sp>
-        <p:nvSpPr>
-          <p:cNvPr id="8" name="Rounded Rectangle 7"/>
+          <p:cNvPr id="6" name="Rectangle 5"/>
           <p:cNvSpPr/>
           <p:nvPr/>
         </p:nvSpPr>
         <p:spPr>
           <a:xfrm>
-            <a:off x="6309360" y="2377440"/>
-            <a:ext cx="5212080" cy="2377440"/>
-          </a:xfrm>
-          <a:prstGeom prst="roundRect">
+            <a:off x="640080" y="2468880"/>
+            <a:ext cx="3393338" cy="82296"/>
+          </a:xfrm>
+          <a:prstGeom prst="rect">
             <a:avLst/>
           </a:prstGeom>
           <a:solidFill>
-            <a:srgbClr val="151B26"/>
+            <a:srgbClr val="00FF41"/>
           </a:solidFill>
-          <a:ln w="15240">
-            <a:solidFill>
-              <a:srgbClr val="00FF41"/>
-            </a:solidFill>
-            <a:prstDash val="dash"/>
+          <a:ln>
+            <a:noFill/>
           </a:ln>
           <a:effectLst/>
         </p:spPr>
@@ -7150,14 +9122,14 @@
       </p:sp>
       <p:sp>
         <p:nvSpPr>
-          <p:cNvPr id="9" name="TextBox 8"/>
+          <p:cNvPr id="7" name="TextBox 6"/>
           <p:cNvSpPr txBox="1"/>
           <p:nvPr/>
         </p:nvSpPr>
         <p:spPr>
           <a:xfrm>
-            <a:off x="6309360" y="3200400"/>
-            <a:ext cx="5212080" cy="548640"/>
+            <a:off x="914400" y="2788920"/>
+            <a:ext cx="2844698" cy="457200"/>
           </a:xfrm>
           <a:prstGeom prst="rect">
             <a:avLst/>
@@ -7170,33 +9142,33 @@
           </a:bodyPr>
           <a:lstStyle/>
           <a:p>
-            <a:pPr algn="ctr">
+            <a:pPr algn="l">
               <a:lnSpc>
                 <a:spcPct val="100000"/>
               </a:lnSpc>
             </a:pPr>
             <a:r>
-              <a:rPr sz="1800" b="1">
+              <a:rPr sz="1200" b="1">
                 <a:solidFill>
                   <a:srgbClr val="00FF41"/>
                 </a:solidFill>
                 <a:latin typeface="Courier New"/>
               </a:rPr>
-              <a:t>🖼  Result B</a:t>
-            </a:r>
-          </a:p>
-        </p:txBody>
-      </p:sp>
-      <p:sp>
-        <p:nvSpPr>
-          <p:cNvPr id="10" name="TextBox 9"/>
+              <a:t>PERSONALITY</a:t>
+            </a:r>
+          </a:p>
+        </p:txBody>
+      </p:sp>
+      <p:sp>
+        <p:nvSpPr>
+          <p:cNvPr id="8" name="TextBox 7"/>
           <p:cNvSpPr txBox="1"/>
           <p:nvPr/>
         </p:nvSpPr>
         <p:spPr>
           <a:xfrm>
-            <a:off x="6309360" y="3749039"/>
-            <a:ext cx="5212080" cy="548640"/>
+            <a:off x="914400" y="3246120"/>
+            <a:ext cx="2844698" cy="822960"/>
           </a:xfrm>
           <a:prstGeom prst="rect">
             <a:avLst/>
@@ -7209,33 +9181,33 @@
           </a:bodyPr>
           <a:lstStyle/>
           <a:p>
-            <a:pPr algn="ctr">
+            <a:pPr algn="l">
               <a:lnSpc>
                 <a:spcPct val="100000"/>
               </a:lnSpc>
             </a:pPr>
             <a:r>
-              <a:rPr sz="1400" b="0">
-                <a:solidFill>
-                  <a:srgbClr val="8A94A6"/>
+              <a:rPr sz="2000" b="1">
+                <a:solidFill>
+                  <a:srgbClr val="F5F7FA"/>
                 </a:solidFill>
                 <a:latin typeface="Arial"/>
               </a:rPr>
-              <a:t>“A professional landing page.”</a:t>
-            </a:r>
-          </a:p>
-        </p:txBody>
-      </p:sp>
-      <p:sp>
-        <p:nvSpPr>
-          <p:cNvPr id="11" name="TextBox 10"/>
+              <a:t>Claude 4,200 · GPT 510 · Grok 420</a:t>
+            </a:r>
+          </a:p>
+        </p:txBody>
+      </p:sp>
+      <p:sp>
+        <p:nvSpPr>
+          <p:cNvPr id="9" name="TextBox 8"/>
           <p:cNvSpPr txBox="1"/>
           <p:nvPr/>
         </p:nvSpPr>
         <p:spPr>
           <a:xfrm>
-            <a:off x="640080" y="5029200"/>
-            <a:ext cx="10972800" cy="731520"/>
+            <a:off x="914400" y="4114800"/>
+            <a:ext cx="2844698" cy="1554480"/>
           </a:xfrm>
           <a:prstGeom prst="rect">
             <a:avLst/>
@@ -7250,18 +9222,106 @@
           <a:p>
             <a:pPr algn="l">
               <a:lnSpc>
-                <a:spcPct val="100000"/>
-              </a:lnSpc>
-            </a:pPr>
-            <a:r>
-              <a:rPr sz="1800" b="1">
-                <a:solidFill>
-                  <a:srgbClr val="F5F7FA"/>
+                <a:spcPct val="110000"/>
+              </a:lnSpc>
+            </a:pPr>
+            <a:r>
+              <a:rPr sz="1500" b="0">
+                <a:solidFill>
+                  <a:srgbClr val="8A94A6"/>
                 </a:solidFill>
                 <a:latin typeface="Arial"/>
               </a:rPr>
-              <a:t>The question: why does “professional” often default to one specific layout or design?</a:t>
-            </a:r>
+              <a:t>“Claude does not use emojis unless the person in the conversation asks it to.”</a:t>
+            </a:r>
+          </a:p>
+        </p:txBody>
+      </p:sp>
+      <p:sp>
+        <p:nvSpPr>
+          <p:cNvPr id="10" name="Rounded Rectangle 9"/>
+          <p:cNvSpPr/>
+          <p:nvPr/>
+        </p:nvSpPr>
+        <p:spPr>
+          <a:xfrm>
+            <a:off x="4399178" y="2468880"/>
+            <a:ext cx="3393338" cy="3383280"/>
+          </a:xfrm>
+          <a:prstGeom prst="roundRect">
+            <a:avLst/>
+          </a:prstGeom>
+          <a:solidFill>
+            <a:srgbClr val="151B26"/>
+          </a:solidFill>
+          <a:ln>
+            <a:noFill/>
+          </a:ln>
+          <a:effectLst/>
+        </p:spPr>
+        <p:style>
+          <a:lnRef idx="1">
+            <a:schemeClr val="accent1"/>
+          </a:lnRef>
+          <a:fillRef idx="3">
+            <a:schemeClr val="accent1"/>
+          </a:fillRef>
+          <a:effectRef idx="2">
+            <a:schemeClr val="accent1"/>
+          </a:effectRef>
+          <a:fontRef idx="minor">
+            <a:schemeClr val="lt1"/>
+          </a:fontRef>
+        </p:style>
+        <p:txBody>
+          <a:bodyPr rtlCol="0" anchor="ctr"/>
+          <a:lstStyle/>
+          <a:p>
+            <a:pPr algn="ctr"/>
+          </a:p>
+        </p:txBody>
+      </p:sp>
+      <p:sp>
+        <p:nvSpPr>
+          <p:cNvPr id="11" name="Rectangle 10"/>
+          <p:cNvSpPr/>
+          <p:nvPr/>
+        </p:nvSpPr>
+        <p:spPr>
+          <a:xfrm>
+            <a:off x="4399178" y="2468880"/>
+            <a:ext cx="3393338" cy="82296"/>
+          </a:xfrm>
+          <a:prstGeom prst="rect">
+            <a:avLst/>
+          </a:prstGeom>
+          <a:solidFill>
+            <a:srgbClr val="00FF41"/>
+          </a:solidFill>
+          <a:ln>
+            <a:noFill/>
+          </a:ln>
+          <a:effectLst/>
+        </p:spPr>
+        <p:style>
+          <a:lnRef idx="1">
+            <a:schemeClr val="accent1"/>
+          </a:lnRef>
+          <a:fillRef idx="3">
+            <a:schemeClr val="accent1"/>
+          </a:fillRef>
+          <a:effectRef idx="2">
+            <a:schemeClr val="accent1"/>
+          </a:effectRef>
+          <a:fontRef idx="minor">
+            <a:schemeClr val="lt1"/>
+          </a:fontRef>
+        </p:style>
+        <p:txBody>
+          <a:bodyPr rtlCol="0" anchor="ctr"/>
+          <a:lstStyle/>
+          <a:p>
+            <a:pPr algn="ctr"/>
           </a:p>
         </p:txBody>
       </p:sp>
@@ -7273,8 +9333,8 @@
         </p:nvSpPr>
         <p:spPr>
           <a:xfrm>
-            <a:off x="640080" y="6355080"/>
-            <a:ext cx="10972800" cy="365760"/>
+            <a:off x="4673498" y="2788920"/>
+            <a:ext cx="2844698" cy="457200"/>
           </a:xfrm>
           <a:prstGeom prst="rect">
             <a:avLst/>
@@ -7293,6 +9353,328 @@
               </a:lnSpc>
             </a:pPr>
             <a:r>
+              <a:rPr sz="1200" b="1">
+                <a:solidFill>
+                  <a:srgbClr val="00FF41"/>
+                </a:solidFill>
+                <a:latin typeface="Courier New"/>
+              </a:rPr>
+              <a:t>POLICIES</a:t>
+            </a:r>
+          </a:p>
+        </p:txBody>
+      </p:sp>
+      <p:sp>
+        <p:nvSpPr>
+          <p:cNvPr id="13" name="TextBox 12"/>
+          <p:cNvSpPr txBox="1"/>
+          <p:nvPr/>
+        </p:nvSpPr>
+        <p:spPr>
+          <a:xfrm>
+            <a:off x="4673498" y="3246120"/>
+            <a:ext cx="2844698" cy="822960"/>
+          </a:xfrm>
+          <a:prstGeom prst="rect">
+            <a:avLst/>
+          </a:prstGeom>
+          <a:noFill/>
+        </p:spPr>
+        <p:txBody>
+          <a:bodyPr wrap="square" anchor="t">
+            <a:spAutoFit/>
+          </a:bodyPr>
+          <a:lstStyle/>
+          <a:p>
+            <a:pPr algn="l">
+              <a:lnSpc>
+                <a:spcPct val="100000"/>
+              </a:lnSpc>
+            </a:pPr>
+            <a:r>
+              <a:rPr sz="2000" b="1">
+                <a:solidFill>
+                  <a:srgbClr val="F5F7FA"/>
+                </a:solidFill>
+                <a:latin typeface="Arial"/>
+              </a:rPr>
+              <a:t>Claude 7,900 · GPT 2,300 · Grok 260</a:t>
+            </a:r>
+          </a:p>
+        </p:txBody>
+      </p:sp>
+      <p:sp>
+        <p:nvSpPr>
+          <p:cNvPr id="14" name="TextBox 13"/>
+          <p:cNvSpPr txBox="1"/>
+          <p:nvPr/>
+        </p:nvSpPr>
+        <p:spPr>
+          <a:xfrm>
+            <a:off x="4673498" y="4114800"/>
+            <a:ext cx="2844698" cy="1554480"/>
+          </a:xfrm>
+          <a:prstGeom prst="rect">
+            <a:avLst/>
+          </a:prstGeom>
+          <a:noFill/>
+        </p:spPr>
+        <p:txBody>
+          <a:bodyPr wrap="square" anchor="t">
+            <a:spAutoFit/>
+          </a:bodyPr>
+          <a:lstStyle/>
+          <a:p>
+            <a:pPr algn="l">
+              <a:lnSpc>
+                <a:spcPct val="110000"/>
+              </a:lnSpc>
+            </a:pPr>
+            <a:r>
+              <a:rPr sz="1500" b="0">
+                <a:solidFill>
+                  <a:srgbClr val="8A94A6"/>
+                </a:solidFill>
+                <a:latin typeface="Arial"/>
+              </a:rPr>
+              <a:t>“NEVER reproduce song lyrics (not even one line).” · “Do not mention ads unless the user asks.”</a:t>
+            </a:r>
+          </a:p>
+        </p:txBody>
+      </p:sp>
+      <p:sp>
+        <p:nvSpPr>
+          <p:cNvPr id="15" name="Rounded Rectangle 14"/>
+          <p:cNvSpPr/>
+          <p:nvPr/>
+        </p:nvSpPr>
+        <p:spPr>
+          <a:xfrm>
+            <a:off x="8158276" y="2468880"/>
+            <a:ext cx="3393338" cy="3383280"/>
+          </a:xfrm>
+          <a:prstGeom prst="roundRect">
+            <a:avLst/>
+          </a:prstGeom>
+          <a:solidFill>
+            <a:srgbClr val="151B26"/>
+          </a:solidFill>
+          <a:ln>
+            <a:noFill/>
+          </a:ln>
+          <a:effectLst/>
+        </p:spPr>
+        <p:style>
+          <a:lnRef idx="1">
+            <a:schemeClr val="accent1"/>
+          </a:lnRef>
+          <a:fillRef idx="3">
+            <a:schemeClr val="accent1"/>
+          </a:fillRef>
+          <a:effectRef idx="2">
+            <a:schemeClr val="accent1"/>
+          </a:effectRef>
+          <a:fontRef idx="minor">
+            <a:schemeClr val="lt1"/>
+          </a:fontRef>
+        </p:style>
+        <p:txBody>
+          <a:bodyPr rtlCol="0" anchor="ctr"/>
+          <a:lstStyle/>
+          <a:p>
+            <a:pPr algn="ctr"/>
+          </a:p>
+        </p:txBody>
+      </p:sp>
+      <p:sp>
+        <p:nvSpPr>
+          <p:cNvPr id="16" name="Rectangle 15"/>
+          <p:cNvSpPr/>
+          <p:nvPr/>
+        </p:nvSpPr>
+        <p:spPr>
+          <a:xfrm>
+            <a:off x="8158276" y="2468880"/>
+            <a:ext cx="3393338" cy="82296"/>
+          </a:xfrm>
+          <a:prstGeom prst="rect">
+            <a:avLst/>
+          </a:prstGeom>
+          <a:solidFill>
+            <a:srgbClr val="00FF41"/>
+          </a:solidFill>
+          <a:ln>
+            <a:noFill/>
+          </a:ln>
+          <a:effectLst/>
+        </p:spPr>
+        <p:style>
+          <a:lnRef idx="1">
+            <a:schemeClr val="accent1"/>
+          </a:lnRef>
+          <a:fillRef idx="3">
+            <a:schemeClr val="accent1"/>
+          </a:fillRef>
+          <a:effectRef idx="2">
+            <a:schemeClr val="accent1"/>
+          </a:effectRef>
+          <a:fontRef idx="minor">
+            <a:schemeClr val="lt1"/>
+          </a:fontRef>
+        </p:style>
+        <p:txBody>
+          <a:bodyPr rtlCol="0" anchor="ctr"/>
+          <a:lstStyle/>
+          <a:p>
+            <a:pPr algn="ctr"/>
+          </a:p>
+        </p:txBody>
+      </p:sp>
+      <p:sp>
+        <p:nvSpPr>
+          <p:cNvPr id="17" name="TextBox 16"/>
+          <p:cNvSpPr txBox="1"/>
+          <p:nvPr/>
+        </p:nvSpPr>
+        <p:spPr>
+          <a:xfrm>
+            <a:off x="8432596" y="2788920"/>
+            <a:ext cx="2844698" cy="457200"/>
+          </a:xfrm>
+          <a:prstGeom prst="rect">
+            <a:avLst/>
+          </a:prstGeom>
+          <a:noFill/>
+        </p:spPr>
+        <p:txBody>
+          <a:bodyPr wrap="square" anchor="t">
+            <a:spAutoFit/>
+          </a:bodyPr>
+          <a:lstStyle/>
+          <a:p>
+            <a:pPr algn="l">
+              <a:lnSpc>
+                <a:spcPct val="100000"/>
+              </a:lnSpc>
+            </a:pPr>
+            <a:r>
+              <a:rPr sz="1200" b="1">
+                <a:solidFill>
+                  <a:srgbClr val="00FF41"/>
+                </a:solidFill>
+                <a:latin typeface="Courier New"/>
+              </a:rPr>
+              <a:t>TOOLS</a:t>
+            </a:r>
+          </a:p>
+        </p:txBody>
+      </p:sp>
+      <p:sp>
+        <p:nvSpPr>
+          <p:cNvPr id="18" name="TextBox 17"/>
+          <p:cNvSpPr txBox="1"/>
+          <p:nvPr/>
+        </p:nvSpPr>
+        <p:spPr>
+          <a:xfrm>
+            <a:off x="8432596" y="3246120"/>
+            <a:ext cx="2844698" cy="822960"/>
+          </a:xfrm>
+          <a:prstGeom prst="rect">
+            <a:avLst/>
+          </a:prstGeom>
+          <a:noFill/>
+        </p:spPr>
+        <p:txBody>
+          <a:bodyPr wrap="square" anchor="t">
+            <a:spAutoFit/>
+          </a:bodyPr>
+          <a:lstStyle/>
+          <a:p>
+            <a:pPr algn="l">
+              <a:lnSpc>
+                <a:spcPct val="100000"/>
+              </a:lnSpc>
+            </a:pPr>
+            <a:r>
+              <a:rPr sz="2000" b="1">
+                <a:solidFill>
+                  <a:srgbClr val="F5F7FA"/>
+                </a:solidFill>
+                <a:latin typeface="Arial"/>
+              </a:rPr>
+              <a:t>Claude 12,000 · GPT 13,000 · Grok 1,600</a:t>
+            </a:r>
+          </a:p>
+        </p:txBody>
+      </p:sp>
+      <p:sp>
+        <p:nvSpPr>
+          <p:cNvPr id="19" name="TextBox 18"/>
+          <p:cNvSpPr txBox="1"/>
+          <p:nvPr/>
+        </p:nvSpPr>
+        <p:spPr>
+          <a:xfrm>
+            <a:off x="8432596" y="4114800"/>
+            <a:ext cx="2844698" cy="1554480"/>
+          </a:xfrm>
+          <a:prstGeom prst="rect">
+            <a:avLst/>
+          </a:prstGeom>
+          <a:noFill/>
+        </p:spPr>
+        <p:txBody>
+          <a:bodyPr wrap="square" anchor="t">
+            <a:spAutoFit/>
+          </a:bodyPr>
+          <a:lstStyle/>
+          <a:p>
+            <a:pPr algn="l">
+              <a:lnSpc>
+                <a:spcPct val="110000"/>
+              </a:lnSpc>
+            </a:pPr>
+            <a:r>
+              <a:rPr sz="1500" b="0">
+                <a:solidFill>
+                  <a:srgbClr val="8A94A6"/>
+                </a:solidFill>
+                <a:latin typeface="Arial"/>
+              </a:rPr>
+              <a:t>How and when to search the web, read files, make PDFs — the biggest share by far.</a:t>
+            </a:r>
+          </a:p>
+        </p:txBody>
+      </p:sp>
+      <p:sp>
+        <p:nvSpPr>
+          <p:cNvPr id="20" name="TextBox 19"/>
+          <p:cNvSpPr txBox="1"/>
+          <p:nvPr/>
+        </p:nvSpPr>
+        <p:spPr>
+          <a:xfrm>
+            <a:off x="640080" y="6355080"/>
+            <a:ext cx="10972800" cy="365760"/>
+          </a:xfrm>
+          <a:prstGeom prst="rect">
+            <a:avLst/>
+          </a:prstGeom>
+          <a:noFill/>
+        </p:spPr>
+        <p:txBody>
+          <a:bodyPr wrap="square" anchor="t">
+            <a:spAutoFit/>
+          </a:bodyPr>
+          <a:lstStyle/>
+          <a:p>
+            <a:pPr algn="l">
+              <a:lnSpc>
+                <a:spcPct val="100000"/>
+              </a:lnSpc>
+            </a:pPr>
+            <a:r>
               <a:rPr sz="1000" b="0">
                 <a:solidFill>
                   <a:srgbClr val="5A6474"/>
@@ -7300,6 +9682,45 @@
                 <a:latin typeface="Courier New"/>
               </a:rPr>
               <a:t>Good Code, Good Vibes · TECHIE 1121 · Cornell Tech · Summer 2026</a:t>
+            </a:r>
+          </a:p>
+        </p:txBody>
+      </p:sp>
+      <p:sp>
+        <p:nvSpPr>
+          <p:cNvPr id="21" name="TextBox 20"/>
+          <p:cNvSpPr txBox="1"/>
+          <p:nvPr/>
+        </p:nvSpPr>
+        <p:spPr>
+          <a:xfrm>
+            <a:off x="640080" y="6053328"/>
+            <a:ext cx="10972800" cy="320040"/>
+          </a:xfrm>
+          <a:prstGeom prst="rect">
+            <a:avLst/>
+          </a:prstGeom>
+          <a:noFill/>
+        </p:spPr>
+        <p:txBody>
+          <a:bodyPr wrap="square" anchor="t">
+            <a:spAutoFit/>
+          </a:bodyPr>
+          <a:lstStyle/>
+          <a:p>
+            <a:pPr algn="l">
+              <a:lnSpc>
+                <a:spcPct val="100000"/>
+              </a:lnSpc>
+            </a:pPr>
+            <a:r>
+              <a:rPr sz="1050" b="0">
+                <a:solidFill>
+                  <a:srgbClr val="5A6474"/>
+                </a:solidFill>
+                <a:latin typeface="Courier New"/>
+              </a:rPr>
+              <a:t>Source: word counts &amp; quotes: system prompts extracted by Ásgeir Thor Johnson · analysis: K. Schaul, The Washington Post</a:t>
             </a:r>
           </a:p>
         </p:txBody>
@@ -7364,7 +9785,7 @@
                 </a:solidFill>
                 <a:latin typeface="Courier New"/>
               </a:rPr>
-              <a:t>ACTIVITY</a:t>
+              <a:t>HIDDEN RULES · SO WHAT</a:t>
             </a:r>
           </a:p>
         </p:txBody>
@@ -7447,7 +9868,7 @@
                 </a:solidFill>
                 <a:latin typeface="Arial"/>
               </a:rPr>
-              <a:t>The cross-tool benchmark</a:t>
+              <a:t>Whose values? Read them yourself</a:t>
             </a:r>
           </a:p>
         </p:txBody>
@@ -7495,7 +9916,7 @@
                 </a:solidFill>
                 <a:latin typeface="Arial"/>
               </a:rPr>
-              <a:t>The mission: run the SAME prompt across three different platforms.</a:t>
+              <a:t>A system prompt is bias by design: someone chose the persona, the taboos, and the defaults before you typed a word.</a:t>
             </a:r>
           </a:p>
           <a:p>
@@ -7520,7 +9941,7 @@
                 </a:solidFill>
                 <a:latin typeface="Arial"/>
               </a:rPr>
-              <a:t>The prompt: “Build a social networking profile page for a community organizer in a specific area you’re familiar with.”</a:t>
+              <a:t>Quick fixes happen here too: after Grok’s antisemitic tirade, xAI deleted one line — “You tell like it is and you are not afraid to offend people who are politically correct.”</a:t>
             </a:r>
           </a:p>
           <a:p>
@@ -7545,7 +9966,7 @@
                 </a:solidFill>
                 <a:latin typeface="Arial"/>
               </a:rPr>
-              <a:t>Look for: did it use relevant imagery or icons?</a:t>
+              <a:t>“It’s like we’ve been having this whole conversation before this conversation.” — Ásgeir Thor Johnson</a:t>
             </a:r>
           </a:p>
           <a:p>
@@ -7570,7 +9991,7 @@
                 </a:solidFill>
                 <a:latin typeface="Arial"/>
               </a:rPr>
-              <a:t>Is the terminology correct for the location?</a:t>
+              <a:t>Read the leaks: github.com/asgeirtj/system_prompts_leaks (57k★) — Claude, ChatGPT, Gemini, Grok, Copilot &amp; more.</a:t>
             </a:r>
           </a:p>
           <a:p>
@@ -7595,7 +10016,7 @@
                 </a:solidFill>
                 <a:latin typeface="Arial"/>
               </a:rPr>
-              <a:t>Does the wording or layout assume anything about who uses the site?</a:t>
+              <a:t>Try it: skim your own tool’s system prompt and find three value judgments its maker made for you.</a:t>
             </a:r>
           </a:p>
         </p:txBody>
@@ -7635,6 +10056,45 @@
                 <a:latin typeface="Courier New"/>
               </a:rPr>
               <a:t>Good Code, Good Vibes · TECHIE 1121 · Cornell Tech · Summer 2026</a:t>
+            </a:r>
+          </a:p>
+        </p:txBody>
+      </p:sp>
+      <p:sp>
+        <p:nvSpPr>
+          <p:cNvPr id="7" name="TextBox 6"/>
+          <p:cNvSpPr txBox="1"/>
+          <p:nvPr/>
+        </p:nvSpPr>
+        <p:spPr>
+          <a:xfrm>
+            <a:off x="640080" y="6053328"/>
+            <a:ext cx="10972800" cy="320040"/>
+          </a:xfrm>
+          <a:prstGeom prst="rect">
+            <a:avLst/>
+          </a:prstGeom>
+          <a:noFill/>
+        </p:spPr>
+        <p:txBody>
+          <a:bodyPr wrap="square" anchor="t">
+            <a:spAutoFit/>
+          </a:bodyPr>
+          <a:lstStyle/>
+          <a:p>
+            <a:pPr algn="l">
+              <a:lnSpc>
+                <a:spcPct val="100000"/>
+              </a:lnSpc>
+            </a:pPr>
+            <a:r>
+              <a:rPr sz="1050" b="0">
+                <a:solidFill>
+                  <a:srgbClr val="5A6474"/>
+                </a:solidFill>
+                <a:latin typeface="Courier New"/>
+              </a:rPr>
+              <a:t>Source: K. Schaul, The Washington Post, May 11 2026 · github.com/asgeirtj/system_prompts_leaks</a:t>
             </a:r>
           </a:p>
         </p:txBody>
@@ -7699,65 +10159,21 @@
                 </a:solidFill>
                 <a:latin typeface="Courier New"/>
               </a:rPr>
-              <a:t>AUDIT</a:t>
-            </a:r>
-          </a:p>
-        </p:txBody>
-      </p:sp>
-      <p:sp>
-        <p:nvSpPr>
-          <p:cNvPr id="3" name="Rectangle 2"/>
-          <p:cNvSpPr/>
-          <p:nvPr/>
-        </p:nvSpPr>
-        <p:spPr>
-          <a:xfrm>
-            <a:off x="640080" y="932688"/>
-            <a:ext cx="822960" cy="73152"/>
-          </a:xfrm>
-          <a:prstGeom prst="rect">
-            <a:avLst/>
-          </a:prstGeom>
-          <a:solidFill>
-            <a:srgbClr val="00FF41"/>
-          </a:solidFill>
-          <a:ln>
-            <a:noFill/>
-          </a:ln>
-          <a:effectLst/>
-        </p:spPr>
-        <p:style>
-          <a:lnRef idx="1">
-            <a:schemeClr val="accent1"/>
-          </a:lnRef>
-          <a:fillRef idx="3">
-            <a:schemeClr val="accent1"/>
-          </a:fillRef>
-          <a:effectRef idx="2">
-            <a:schemeClr val="accent1"/>
-          </a:effectRef>
-          <a:fontRef idx="minor">
-            <a:schemeClr val="lt1"/>
-          </a:fontRef>
-        </p:style>
-        <p:txBody>
-          <a:bodyPr rtlCol="0" anchor="ctr"/>
-          <a:lstStyle/>
-          <a:p>
-            <a:pPr algn="ctr"/>
-          </a:p>
-        </p:txBody>
-      </p:sp>
-      <p:sp>
-        <p:nvSpPr>
-          <p:cNvPr id="4" name="TextBox 3"/>
+              <a:t>TRANSITION</a:t>
+            </a:r>
+          </a:p>
+        </p:txBody>
+      </p:sp>
+      <p:sp>
+        <p:nvSpPr>
+          <p:cNvPr id="3" name="TextBox 2"/>
           <p:cNvSpPr txBox="1"/>
           <p:nvPr/>
         </p:nvSpPr>
         <p:spPr>
           <a:xfrm>
-            <a:off x="640080" y="1188720"/>
-            <a:ext cx="10972800" cy="914400"/>
+            <a:off x="1097280" y="548640"/>
+            <a:ext cx="2743200" cy="1828800"/>
           </a:xfrm>
           <a:prstGeom prst="rect">
             <a:avLst/>
@@ -7776,115 +10192,27 @@
               </a:lnSpc>
             </a:pPr>
             <a:r>
-              <a:rPr sz="3200" b="1">
-                <a:solidFill>
-                  <a:srgbClr val="F5F7FA"/>
+              <a:rPr sz="12000" b="1">
+                <a:solidFill>
+                  <a:srgbClr val="00FF41"/>
                 </a:solidFill>
                 <a:latin typeface="Arial"/>
               </a:rPr>
-              <a:t>The Vibe Audit checklist</a:t>
-            </a:r>
-          </a:p>
-        </p:txBody>
-      </p:sp>
-      <p:sp>
-        <p:nvSpPr>
-          <p:cNvPr id="5" name="Rounded Rectangle 4"/>
-          <p:cNvSpPr/>
-          <p:nvPr/>
-        </p:nvSpPr>
-        <p:spPr>
-          <a:xfrm>
-            <a:off x="640080" y="2468880"/>
-            <a:ext cx="3393338" cy="3383280"/>
-          </a:xfrm>
-          <a:prstGeom prst="roundRect">
-            <a:avLst/>
-          </a:prstGeom>
-          <a:solidFill>
-            <a:srgbClr val="151B26"/>
-          </a:solidFill>
-          <a:ln>
-            <a:noFill/>
-          </a:ln>
-          <a:effectLst/>
-        </p:spPr>
-        <p:style>
-          <a:lnRef idx="1">
-            <a:schemeClr val="accent1"/>
-          </a:lnRef>
-          <a:fillRef idx="3">
-            <a:schemeClr val="accent1"/>
-          </a:fillRef>
-          <a:effectRef idx="2">
-            <a:schemeClr val="accent1"/>
-          </a:effectRef>
-          <a:fontRef idx="minor">
-            <a:schemeClr val="lt1"/>
-          </a:fontRef>
-        </p:style>
-        <p:txBody>
-          <a:bodyPr rtlCol="0" anchor="ctr"/>
-          <a:lstStyle/>
-          <a:p>
-            <a:pPr algn="ctr"/>
-          </a:p>
-        </p:txBody>
-      </p:sp>
-      <p:sp>
-        <p:nvSpPr>
-          <p:cNvPr id="6" name="Rectangle 5"/>
-          <p:cNvSpPr/>
-          <p:nvPr/>
-        </p:nvSpPr>
-        <p:spPr>
-          <a:xfrm>
-            <a:off x="640080" y="2468880"/>
-            <a:ext cx="3393338" cy="82296"/>
-          </a:xfrm>
-          <a:prstGeom prst="rect">
-            <a:avLst/>
-          </a:prstGeom>
-          <a:solidFill>
-            <a:srgbClr val="00FF41"/>
-          </a:solidFill>
-          <a:ln>
-            <a:noFill/>
-          </a:ln>
-          <a:effectLst/>
-        </p:spPr>
-        <p:style>
-          <a:lnRef idx="1">
-            <a:schemeClr val="accent1"/>
-          </a:lnRef>
-          <a:fillRef idx="3">
-            <a:schemeClr val="accent1"/>
-          </a:fillRef>
-          <a:effectRef idx="2">
-            <a:schemeClr val="accent1"/>
-          </a:effectRef>
-          <a:fontRef idx="minor">
-            <a:schemeClr val="lt1"/>
-          </a:fontRef>
-        </p:style>
-        <p:txBody>
-          <a:bodyPr rtlCol="0" anchor="ctr"/>
-          <a:lstStyle/>
-          <a:p>
-            <a:pPr algn="ctr"/>
-          </a:p>
-        </p:txBody>
-      </p:sp>
-      <p:sp>
-        <p:nvSpPr>
-          <p:cNvPr id="7" name="TextBox 6"/>
+              <a:t>?</a:t>
+            </a:r>
+          </a:p>
+        </p:txBody>
+      </p:sp>
+      <p:sp>
+        <p:nvSpPr>
+          <p:cNvPr id="4" name="TextBox 3"/>
           <p:cNvSpPr txBox="1"/>
           <p:nvPr/>
         </p:nvSpPr>
         <p:spPr>
           <a:xfrm>
-            <a:off x="914400" y="2788920"/>
-            <a:ext cx="2844698" cy="457200"/>
+            <a:off x="1097280" y="2743200"/>
+            <a:ext cx="10058400" cy="3108960"/>
           </a:xfrm>
           <a:prstGeom prst="rect">
             <a:avLst/>
@@ -7899,512 +10227,24 @@
           <a:p>
             <a:pPr algn="l">
               <a:lnSpc>
-                <a:spcPct val="100000"/>
-              </a:lnSpc>
-            </a:pPr>
-            <a:r>
-              <a:rPr sz="1200" b="1">
-                <a:solidFill>
-                  <a:srgbClr val="00FF41"/>
-                </a:solidFill>
-                <a:latin typeface="Courier New"/>
-              </a:rPr>
-              <a:t>REPRESENTATION</a:t>
-            </a:r>
-          </a:p>
-        </p:txBody>
-      </p:sp>
-      <p:sp>
-        <p:nvSpPr>
-          <p:cNvPr id="8" name="TextBox 7"/>
-          <p:cNvSpPr txBox="1"/>
-          <p:nvPr/>
-        </p:nvSpPr>
-        <p:spPr>
-          <a:xfrm>
-            <a:off x="914400" y="3246120"/>
-            <a:ext cx="2844698" cy="822960"/>
-          </a:xfrm>
-          <a:prstGeom prst="rect">
-            <a:avLst/>
-          </a:prstGeom>
-          <a:noFill/>
-        </p:spPr>
-        <p:txBody>
-          <a:bodyPr wrap="square" anchor="t">
-            <a:spAutoFit/>
-          </a:bodyPr>
-          <a:lstStyle/>
-          <a:p>
-            <a:pPr algn="l">
-              <a:lnSpc>
-                <a:spcPct val="100000"/>
-              </a:lnSpc>
-            </a:pPr>
-            <a:r>
-              <a:rPr sz="2000" b="1">
+                <a:spcPct val="112000"/>
+              </a:lnSpc>
+            </a:pPr>
+            <a:r>
+              <a:rPr sz="3000" b="1">
                 <a:solidFill>
                   <a:srgbClr val="F5F7FA"/>
                 </a:solidFill>
                 <a:latin typeface="Arial"/>
               </a:rPr>
-              <a:t>Who is this for?</a:t>
-            </a:r>
-          </a:p>
-        </p:txBody>
-      </p:sp>
-      <p:sp>
-        <p:nvSpPr>
-          <p:cNvPr id="9" name="TextBox 8"/>
-          <p:cNvSpPr txBox="1"/>
-          <p:nvPr/>
-        </p:nvSpPr>
-        <p:spPr>
-          <a:xfrm>
-            <a:off x="914400" y="4114800"/>
-            <a:ext cx="2844698" cy="1554480"/>
-          </a:xfrm>
-          <a:prstGeom prst="rect">
-            <a:avLst/>
-          </a:prstGeom>
-          <a:noFill/>
-        </p:spPr>
-        <p:txBody>
-          <a:bodyPr wrap="square" anchor="t">
-            <a:spAutoFit/>
-          </a:bodyPr>
-          <a:lstStyle/>
-          <a:p>
-            <a:pPr algn="l">
-              <a:lnSpc>
-                <a:spcPct val="110000"/>
-              </a:lnSpc>
-            </a:pPr>
-            <a:r>
-              <a:rPr sz="1500" b="0">
-                <a:solidFill>
-                  <a:srgbClr val="8A94A6"/>
-                </a:solidFill>
-                <a:latin typeface="Arial"/>
-              </a:rPr>
-              <a:t>Who is this interface designed for? Who might be left out or overlooked?</a:t>
-            </a:r>
-          </a:p>
-        </p:txBody>
-      </p:sp>
-      <p:sp>
-        <p:nvSpPr>
-          <p:cNvPr id="10" name="Rounded Rectangle 9"/>
-          <p:cNvSpPr/>
-          <p:nvPr/>
-        </p:nvSpPr>
-        <p:spPr>
-          <a:xfrm>
-            <a:off x="4399178" y="2468880"/>
-            <a:ext cx="3393338" cy="3383280"/>
-          </a:xfrm>
-          <a:prstGeom prst="roundRect">
-            <a:avLst/>
-          </a:prstGeom>
-          <a:solidFill>
-            <a:srgbClr val="151B26"/>
-          </a:solidFill>
-          <a:ln>
-            <a:noFill/>
-          </a:ln>
-          <a:effectLst/>
-        </p:spPr>
-        <p:style>
-          <a:lnRef idx="1">
-            <a:schemeClr val="accent1"/>
-          </a:lnRef>
-          <a:fillRef idx="3">
-            <a:schemeClr val="accent1"/>
-          </a:fillRef>
-          <a:effectRef idx="2">
-            <a:schemeClr val="accent1"/>
-          </a:effectRef>
-          <a:fontRef idx="minor">
-            <a:schemeClr val="lt1"/>
-          </a:fontRef>
-        </p:style>
-        <p:txBody>
-          <a:bodyPr rtlCol="0" anchor="ctr"/>
-          <a:lstStyle/>
-          <a:p>
-            <a:pPr algn="ctr"/>
-          </a:p>
-        </p:txBody>
-      </p:sp>
-      <p:sp>
-        <p:nvSpPr>
-          <p:cNvPr id="11" name="Rectangle 10"/>
-          <p:cNvSpPr/>
-          <p:nvPr/>
-        </p:nvSpPr>
-        <p:spPr>
-          <a:xfrm>
-            <a:off x="4399178" y="2468880"/>
-            <a:ext cx="3393338" cy="82296"/>
-          </a:xfrm>
-          <a:prstGeom prst="rect">
-            <a:avLst/>
-          </a:prstGeom>
-          <a:solidFill>
-            <a:srgbClr val="00FF41"/>
-          </a:solidFill>
-          <a:ln>
-            <a:noFill/>
-          </a:ln>
-          <a:effectLst/>
-        </p:spPr>
-        <p:style>
-          <a:lnRef idx="1">
-            <a:schemeClr val="accent1"/>
-          </a:lnRef>
-          <a:fillRef idx="3">
-            <a:schemeClr val="accent1"/>
-          </a:fillRef>
-          <a:effectRef idx="2">
-            <a:schemeClr val="accent1"/>
-          </a:effectRef>
-          <a:fontRef idx="minor">
-            <a:schemeClr val="lt1"/>
-          </a:fontRef>
-        </p:style>
-        <p:txBody>
-          <a:bodyPr rtlCol="0" anchor="ctr"/>
-          <a:lstStyle/>
-          <a:p>
-            <a:pPr algn="ctr"/>
-          </a:p>
-        </p:txBody>
-      </p:sp>
-      <p:sp>
-        <p:nvSpPr>
-          <p:cNvPr id="12" name="TextBox 11"/>
-          <p:cNvSpPr txBox="1"/>
-          <p:nvPr/>
-        </p:nvSpPr>
-        <p:spPr>
-          <a:xfrm>
-            <a:off x="4673498" y="2788920"/>
-            <a:ext cx="2844698" cy="457200"/>
-          </a:xfrm>
-          <a:prstGeom prst="rect">
-            <a:avLst/>
-          </a:prstGeom>
-          <a:noFill/>
-        </p:spPr>
-        <p:txBody>
-          <a:bodyPr wrap="square" anchor="t">
-            <a:spAutoFit/>
-          </a:bodyPr>
-          <a:lstStyle/>
-          <a:p>
-            <a:pPr algn="l">
-              <a:lnSpc>
-                <a:spcPct val="100000"/>
-              </a:lnSpc>
-            </a:pPr>
-            <a:r>
-              <a:rPr sz="1200" b="1">
-                <a:solidFill>
-                  <a:srgbClr val="00FF41"/>
-                </a:solidFill>
-                <a:latin typeface="Courier New"/>
-              </a:rPr>
-              <a:t>ACCESSIBILITY</a:t>
-            </a:r>
-          </a:p>
-        </p:txBody>
-      </p:sp>
-      <p:sp>
-        <p:nvSpPr>
-          <p:cNvPr id="13" name="TextBox 12"/>
-          <p:cNvSpPr txBox="1"/>
-          <p:nvPr/>
-        </p:nvSpPr>
-        <p:spPr>
-          <a:xfrm>
-            <a:off x="4673498" y="3246120"/>
-            <a:ext cx="2844698" cy="822960"/>
-          </a:xfrm>
-          <a:prstGeom prst="rect">
-            <a:avLst/>
-          </a:prstGeom>
-          <a:noFill/>
-        </p:spPr>
-        <p:txBody>
-          <a:bodyPr wrap="square" anchor="t">
-            <a:spAutoFit/>
-          </a:bodyPr>
-          <a:lstStyle/>
-          <a:p>
-            <a:pPr algn="l">
-              <a:lnSpc>
-                <a:spcPct val="100000"/>
-              </a:lnSpc>
-            </a:pPr>
-            <a:r>
-              <a:rPr sz="2000" b="1">
-                <a:solidFill>
-                  <a:srgbClr val="F5F7FA"/>
-                </a:solidFill>
-                <a:latin typeface="Arial"/>
-              </a:rPr>
-              <a:t>Does it meet the bar?</a:t>
-            </a:r>
-          </a:p>
-        </p:txBody>
-      </p:sp>
-      <p:sp>
-        <p:nvSpPr>
-          <p:cNvPr id="14" name="TextBox 13"/>
-          <p:cNvSpPr txBox="1"/>
-          <p:nvPr/>
-        </p:nvSpPr>
-        <p:spPr>
-          <a:xfrm>
-            <a:off x="4673498" y="4114800"/>
-            <a:ext cx="2844698" cy="1554480"/>
-          </a:xfrm>
-          <a:prstGeom prst="rect">
-            <a:avLst/>
-          </a:prstGeom>
-          <a:noFill/>
-        </p:spPr>
-        <p:txBody>
-          <a:bodyPr wrap="square" anchor="t">
-            <a:spAutoFit/>
-          </a:bodyPr>
-          <a:lstStyle/>
-          <a:p>
-            <a:pPr algn="l">
-              <a:lnSpc>
-                <a:spcPct val="110000"/>
-              </a:lnSpc>
-            </a:pPr>
-            <a:r>
-              <a:rPr sz="1500" b="0">
-                <a:solidFill>
-                  <a:srgbClr val="8A94A6"/>
-                </a:solidFill>
-                <a:latin typeface="Arial"/>
-              </a:rPr>
-              <a:t>Color contrast, readability, clear navigation — basic accessibility standards.</a:t>
-            </a:r>
-          </a:p>
-        </p:txBody>
-      </p:sp>
-      <p:sp>
-        <p:nvSpPr>
-          <p:cNvPr id="15" name="Rounded Rectangle 14"/>
-          <p:cNvSpPr/>
-          <p:nvPr/>
-        </p:nvSpPr>
-        <p:spPr>
-          <a:xfrm>
-            <a:off x="8158276" y="2468880"/>
-            <a:ext cx="3393338" cy="3383280"/>
-          </a:xfrm>
-          <a:prstGeom prst="roundRect">
-            <a:avLst/>
-          </a:prstGeom>
-          <a:solidFill>
-            <a:srgbClr val="151B26"/>
-          </a:solidFill>
-          <a:ln>
-            <a:noFill/>
-          </a:ln>
-          <a:effectLst/>
-        </p:spPr>
-        <p:style>
-          <a:lnRef idx="1">
-            <a:schemeClr val="accent1"/>
-          </a:lnRef>
-          <a:fillRef idx="3">
-            <a:schemeClr val="accent1"/>
-          </a:fillRef>
-          <a:effectRef idx="2">
-            <a:schemeClr val="accent1"/>
-          </a:effectRef>
-          <a:fontRef idx="minor">
-            <a:schemeClr val="lt1"/>
-          </a:fontRef>
-        </p:style>
-        <p:txBody>
-          <a:bodyPr rtlCol="0" anchor="ctr"/>
-          <a:lstStyle/>
-          <a:p>
-            <a:pPr algn="ctr"/>
-          </a:p>
-        </p:txBody>
-      </p:sp>
-      <p:sp>
-        <p:nvSpPr>
-          <p:cNvPr id="16" name="Rectangle 15"/>
-          <p:cNvSpPr/>
-          <p:nvPr/>
-        </p:nvSpPr>
-        <p:spPr>
-          <a:xfrm>
-            <a:off x="8158276" y="2468880"/>
-            <a:ext cx="3393338" cy="82296"/>
-          </a:xfrm>
-          <a:prstGeom prst="rect">
-            <a:avLst/>
-          </a:prstGeom>
-          <a:solidFill>
-            <a:srgbClr val="00FF41"/>
-          </a:solidFill>
-          <a:ln>
-            <a:noFill/>
-          </a:ln>
-          <a:effectLst/>
-        </p:spPr>
-        <p:style>
-          <a:lnRef idx="1">
-            <a:schemeClr val="accent1"/>
-          </a:lnRef>
-          <a:fillRef idx="3">
-            <a:schemeClr val="accent1"/>
-          </a:fillRef>
-          <a:effectRef idx="2">
-            <a:schemeClr val="accent1"/>
-          </a:effectRef>
-          <a:fontRef idx="minor">
-            <a:schemeClr val="lt1"/>
-          </a:fontRef>
-        </p:style>
-        <p:txBody>
-          <a:bodyPr rtlCol="0" anchor="ctr"/>
-          <a:lstStyle/>
-          <a:p>
-            <a:pPr algn="ctr"/>
-          </a:p>
-        </p:txBody>
-      </p:sp>
-      <p:sp>
-        <p:nvSpPr>
-          <p:cNvPr id="17" name="TextBox 16"/>
-          <p:cNvSpPr txBox="1"/>
-          <p:nvPr/>
-        </p:nvSpPr>
-        <p:spPr>
-          <a:xfrm>
-            <a:off x="8432596" y="2788920"/>
-            <a:ext cx="2844698" cy="457200"/>
-          </a:xfrm>
-          <a:prstGeom prst="rect">
-            <a:avLst/>
-          </a:prstGeom>
-          <a:noFill/>
-        </p:spPr>
-        <p:txBody>
-          <a:bodyPr wrap="square" anchor="t">
-            <a:spAutoFit/>
-          </a:bodyPr>
-          <a:lstStyle/>
-          <a:p>
-            <a:pPr algn="l">
-              <a:lnSpc>
-                <a:spcPct val="100000"/>
-              </a:lnSpc>
-            </a:pPr>
-            <a:r>
-              <a:rPr sz="1200" b="1">
-                <a:solidFill>
-                  <a:srgbClr val="00FF41"/>
-                </a:solidFill>
-                <a:latin typeface="Courier New"/>
-              </a:rPr>
-              <a:t>ASSUMPTIONS</a:t>
-            </a:r>
-          </a:p>
-        </p:txBody>
-      </p:sp>
-      <p:sp>
-        <p:nvSpPr>
-          <p:cNvPr id="18" name="TextBox 17"/>
-          <p:cNvSpPr txBox="1"/>
-          <p:nvPr/>
-        </p:nvSpPr>
-        <p:spPr>
-          <a:xfrm>
-            <a:off x="8432596" y="3246120"/>
-            <a:ext cx="2844698" cy="822960"/>
-          </a:xfrm>
-          <a:prstGeom prst="rect">
-            <a:avLst/>
-          </a:prstGeom>
-          <a:noFill/>
-        </p:spPr>
-        <p:txBody>
-          <a:bodyPr wrap="square" anchor="t">
-            <a:spAutoFit/>
-          </a:bodyPr>
-          <a:lstStyle/>
-          <a:p>
-            <a:pPr algn="l">
-              <a:lnSpc>
-                <a:spcPct val="100000"/>
-              </a:lnSpc>
-            </a:pPr>
-            <a:r>
-              <a:rPr sz="2000" b="1">
-                <a:solidFill>
-                  <a:srgbClr val="F5F7FA"/>
-                </a:solidFill>
-                <a:latin typeface="Arial"/>
-              </a:rPr>
-              <a:t>What’s baked in?</a:t>
-            </a:r>
-          </a:p>
-        </p:txBody>
-      </p:sp>
-      <p:sp>
-        <p:nvSpPr>
-          <p:cNvPr id="19" name="TextBox 18"/>
-          <p:cNvSpPr txBox="1"/>
-          <p:nvPr/>
-        </p:nvSpPr>
-        <p:spPr>
-          <a:xfrm>
-            <a:off x="8432596" y="4114800"/>
-            <a:ext cx="2844698" cy="1554480"/>
-          </a:xfrm>
-          <a:prstGeom prst="rect">
-            <a:avLst/>
-          </a:prstGeom>
-          <a:noFill/>
-        </p:spPr>
-        <p:txBody>
-          <a:bodyPr wrap="square" anchor="t">
-            <a:spAutoFit/>
-          </a:bodyPr>
-          <a:lstStyle/>
-          <a:p>
-            <a:pPr algn="l">
-              <a:lnSpc>
-                <a:spcPct val="110000"/>
-              </a:lnSpc>
-            </a:pPr>
-            <a:r>
-              <a:rPr sz="1500" b="0">
-                <a:solidFill>
-                  <a:srgbClr val="8A94A6"/>
-                </a:solidFill>
-                <a:latin typeface="Arial"/>
-              </a:rPr>
-              <a:t>What does the design assume — payment access, name formats, language?</a:t>
-            </a:r>
-          </a:p>
-        </p:txBody>
-      </p:sp>
-      <p:sp>
-        <p:nvSpPr>
-          <p:cNvPr id="20" name="TextBox 19"/>
+              <a:t>Time for some activities.</a:t>
+            </a:r>
+          </a:p>
+        </p:txBody>
+      </p:sp>
+      <p:sp>
+        <p:nvSpPr>
+          <p:cNvPr id="5" name="TextBox 4"/>
           <p:cNvSpPr txBox="1"/>
           <p:nvPr/>
         </p:nvSpPr>
